--- a/output_pptx/Hymn_Of_Heaven.pptx
+++ b/output_pptx/Hymn_Of_Heaven.pptx
@@ -3121,23 +3121,23 @@
         </p:nvSpPr>
         <p:spPr>
           <a:xfrm>
-            <a:off x="594360" y="1837944"/>
-            <a:ext cx="11002975" cy="685800"/>
-          </a:xfrm>
-          <a:prstGeom prst="rect">
-            <a:avLst/>
-          </a:prstGeom>
-          <a:noFill/>
-        </p:spPr>
-        <p:txBody>
-          <a:bodyPr wrap="square">
-            <a:spAutoFit/>
-          </a:bodyPr>
-          <a:lstStyle/>
-          <a:p>
-            <a:pPr algn="ctr"/>
-            <a:r>
-              <a:rPr sz="4400" b="1" i="0">
+            <a:off x="640080" y="1650492"/>
+            <a:ext cx="10911535" cy="731520"/>
+          </a:xfrm>
+          <a:prstGeom prst="rect">
+            <a:avLst/>
+          </a:prstGeom>
+          <a:noFill/>
+        </p:spPr>
+        <p:txBody>
+          <a:bodyPr wrap="square">
+            <a:spAutoFit/>
+          </a:bodyPr>
+          <a:lstStyle/>
+          <a:p>
+            <a:pPr algn="ctr"/>
+            <a:r>
+              <a:rPr sz="4800" b="1" i="0">
                 <a:solidFill>
                   <a:srgbClr val="FFFFFF"/>
                 </a:solidFill>
@@ -3156,8 +3156,8 @@
         </p:nvSpPr>
         <p:spPr>
           <a:xfrm>
-            <a:off x="594360" y="2560320"/>
-            <a:ext cx="11002975" cy="384048"/>
+            <a:off x="640080" y="2418588"/>
+            <a:ext cx="10911535" cy="365760"/>
           </a:xfrm>
           <a:prstGeom prst="rect">
             <a:avLst/>
@@ -3174,7 +3174,7 @@
             <a:r>
               <a:rPr sz="2400" b="0" i="1">
                 <a:solidFill>
-                  <a:srgbClr val="B4B4B4"/>
+                  <a:srgbClr val="AAAAAA"/>
                 </a:solidFill>
                 <a:latin typeface="Arial"/>
               </a:rPr>
@@ -3191,8 +3191,78 @@
         </p:nvSpPr>
         <p:spPr>
           <a:xfrm>
-            <a:off x="594360" y="2980944"/>
-            <a:ext cx="11002975" cy="347472"/>
+            <a:off x="640080" y="2985516"/>
+            <a:ext cx="10911535" cy="731520"/>
+          </a:xfrm>
+          <a:prstGeom prst="rect">
+            <a:avLst/>
+          </a:prstGeom>
+          <a:noFill/>
+        </p:spPr>
+        <p:txBody>
+          <a:bodyPr wrap="square">
+            <a:spAutoFit/>
+          </a:bodyPr>
+          <a:lstStyle/>
+          <a:p>
+            <a:pPr algn="ctr"/>
+            <a:r>
+              <a:rPr sz="4800" b="1" i="0">
+                <a:solidFill>
+                  <a:srgbClr val="FFFFFF"/>
+                </a:solidFill>
+                <a:latin typeface="Arial"/>
+              </a:rPr>
+              <a:t>通りは憐みに満ちる</a:t>
+            </a:r>
+          </a:p>
+        </p:txBody>
+      </p:sp>
+      <p:sp>
+        <p:nvSpPr>
+          <p:cNvPr id="5" name="TextBox 4"/>
+          <p:cNvSpPr txBox="1"/>
+          <p:nvPr/>
+        </p:nvSpPr>
+        <p:spPr>
+          <a:xfrm>
+            <a:off x="640080" y="3753612"/>
+            <a:ext cx="10911535" cy="365760"/>
+          </a:xfrm>
+          <a:prstGeom prst="rect">
+            <a:avLst/>
+          </a:prstGeom>
+          <a:noFill/>
+        </p:spPr>
+        <p:txBody>
+          <a:bodyPr wrap="square">
+            <a:spAutoFit/>
+          </a:bodyPr>
+          <a:lstStyle/>
+          <a:p>
+            <a:pPr algn="ctr"/>
+            <a:r>
+              <a:rPr sz="2400" b="0" i="1">
+                <a:solidFill>
+                  <a:srgbClr val="AAAAAA"/>
+                </a:solidFill>
+                <a:latin typeface="Arial"/>
+              </a:rPr>
+              <a:t>toori wa awaremini michiru</a:t>
+            </a:r>
+          </a:p>
+        </p:txBody>
+      </p:sp>
+      <p:sp>
+        <p:nvSpPr>
+          <p:cNvPr id="6" name="TextBox 5"/>
+          <p:cNvSpPr txBox="1"/>
+          <p:nvPr/>
+        </p:nvSpPr>
+        <p:spPr>
+          <a:xfrm>
+            <a:off x="640080" y="4530852"/>
+            <a:ext cx="10911535" cy="310896"/>
           </a:xfrm>
           <a:prstGeom prst="rect">
             <a:avLst/>
@@ -3209,81 +3279,11 @@
             <a:r>
               <a:rPr sz="2000" b="0" i="1">
                 <a:solidFill>
-                  <a:srgbClr val="8C8C8C"/>
-                </a:solidFill>
-                <a:latin typeface="Arial"/>
-              </a:rPr>
-              <a:t/>
-            </a:r>
-          </a:p>
-        </p:txBody>
-      </p:sp>
-      <p:sp>
-        <p:nvSpPr>
-          <p:cNvPr id="5" name="TextBox 4"/>
-          <p:cNvSpPr txBox="1"/>
-          <p:nvPr/>
-        </p:nvSpPr>
-        <p:spPr>
-          <a:xfrm>
-            <a:off x="594360" y="3529584"/>
-            <a:ext cx="11002975" cy="685800"/>
-          </a:xfrm>
-          <a:prstGeom prst="rect">
-            <a:avLst/>
-          </a:prstGeom>
-          <a:noFill/>
-        </p:spPr>
-        <p:txBody>
-          <a:bodyPr wrap="square">
-            <a:spAutoFit/>
-          </a:bodyPr>
-          <a:lstStyle/>
-          <a:p>
-            <a:pPr algn="ctr"/>
-            <a:r>
-              <a:rPr sz="4400" b="1" i="0">
-                <a:solidFill>
-                  <a:srgbClr val="FFFFFF"/>
-                </a:solidFill>
-                <a:latin typeface="Arial"/>
-              </a:rPr>
-              <a:t>通りは憐みに満ちる</a:t>
-            </a:r>
-          </a:p>
-        </p:txBody>
-      </p:sp>
-      <p:sp>
-        <p:nvSpPr>
-          <p:cNvPr id="6" name="TextBox 5"/>
-          <p:cNvSpPr txBox="1"/>
-          <p:nvPr/>
-        </p:nvSpPr>
-        <p:spPr>
-          <a:xfrm>
-            <a:off x="594360" y="4251960"/>
-            <a:ext cx="11002975" cy="384048"/>
-          </a:xfrm>
-          <a:prstGeom prst="rect">
-            <a:avLst/>
-          </a:prstGeom>
-          <a:noFill/>
-        </p:spPr>
-        <p:txBody>
-          <a:bodyPr wrap="square">
-            <a:spAutoFit/>
-          </a:bodyPr>
-          <a:lstStyle/>
-          <a:p>
-            <a:pPr algn="ctr"/>
-            <a:r>
-              <a:rPr sz="2400" b="0" i="1">
-                <a:solidFill>
-                  <a:srgbClr val="B4B4B4"/>
-                </a:solidFill>
-                <a:latin typeface="Arial"/>
-              </a:rPr>
-              <a:t>toori wa awaremini michiru</a:t>
+                  <a:srgbClr val="828282"/>
+                </a:solidFill>
+                <a:latin typeface="Arial"/>
+              </a:rPr>
+              <a:t>Onde a dor se foi e a misericórdia enche as ruas</a:t>
             </a:r>
           </a:p>
         </p:txBody>
@@ -3296,8 +3296,8 @@
         </p:nvSpPr>
         <p:spPr>
           <a:xfrm>
-            <a:off x="594360" y="4672584"/>
-            <a:ext cx="11002975" cy="347472"/>
+            <a:off x="640080" y="4896612"/>
+            <a:ext cx="10911535" cy="310896"/>
           </a:xfrm>
           <a:prstGeom prst="rect">
             <a:avLst/>
@@ -3314,11 +3314,11 @@
             <a:r>
               <a:rPr sz="2000" b="0" i="1">
                 <a:solidFill>
-                  <a:srgbClr val="8C8C8C"/>
-                </a:solidFill>
-                <a:latin typeface="Arial"/>
-              </a:rPr>
-              <a:t/>
+                  <a:srgbClr val="828282"/>
+                </a:solidFill>
+                <a:latin typeface="Arial"/>
+              </a:rPr>
+              <a:t>Para olhar para Aquele que sangrou para me salvar</a:t>
             </a:r>
           </a:p>
         </p:txBody>
@@ -3357,64 +3357,29 @@
         </p:nvSpPr>
         <p:spPr>
           <a:xfrm>
-            <a:off x="594360" y="2894076"/>
-            <a:ext cx="11002975" cy="685800"/>
-          </a:xfrm>
-          <a:prstGeom prst="rect">
-            <a:avLst/>
-          </a:prstGeom>
-          <a:noFill/>
-        </p:spPr>
-        <p:txBody>
-          <a:bodyPr wrap="square">
-            <a:spAutoFit/>
-          </a:bodyPr>
-          <a:lstStyle/>
-          <a:p>
-            <a:pPr algn="ctr"/>
-            <a:r>
-              <a:rPr sz="4400" b="1" i="0">
+            <a:off x="640080" y="2702052"/>
+            <a:ext cx="10911535" cy="731520"/>
+          </a:xfrm>
+          <a:prstGeom prst="rect">
+            <a:avLst/>
+          </a:prstGeom>
+          <a:noFill/>
+        </p:spPr>
+        <p:txBody>
+          <a:bodyPr wrap="square">
+            <a:spAutoFit/>
+          </a:bodyPr>
+          <a:lstStyle/>
+          <a:p>
+            <a:pPr algn="ctr"/>
+            <a:r>
+              <a:rPr sz="4800" b="1" i="0">
                 <a:solidFill>
                   <a:srgbClr val="FFFFFF"/>
                 </a:solidFill>
                 <a:latin typeface="Arial"/>
               </a:rPr>
               <a:t>Para sempre e para sempre</a:t>
-            </a:r>
-          </a:p>
-        </p:txBody>
-      </p:sp>
-      <p:sp>
-        <p:nvSpPr>
-          <p:cNvPr id="3" name="TextBox 2"/>
-          <p:cNvSpPr txBox="1"/>
-          <p:nvPr/>
-        </p:nvSpPr>
-        <p:spPr>
-          <a:xfrm>
-            <a:off x="594360" y="3616452"/>
-            <a:ext cx="11002975" cy="347472"/>
-          </a:xfrm>
-          <a:prstGeom prst="rect">
-            <a:avLst/>
-          </a:prstGeom>
-          <a:noFill/>
-        </p:spPr>
-        <p:txBody>
-          <a:bodyPr wrap="square">
-            <a:spAutoFit/>
-          </a:bodyPr>
-          <a:lstStyle/>
-          <a:p>
-            <a:pPr algn="ctr"/>
-            <a:r>
-              <a:rPr sz="2200" b="0" i="1">
-                <a:solidFill>
-                  <a:srgbClr val="8C8C8C"/>
-                </a:solidFill>
-                <a:latin typeface="Arial"/>
-              </a:rPr>
-              <a:t/>
             </a:r>
           </a:p>
         </p:txBody>
@@ -3453,23 +3418,23 @@
         </p:nvSpPr>
         <p:spPr>
           <a:xfrm>
-            <a:off x="594360" y="2258568"/>
-            <a:ext cx="11002975" cy="685800"/>
-          </a:xfrm>
-          <a:prstGeom prst="rect">
-            <a:avLst/>
-          </a:prstGeom>
-          <a:noFill/>
-        </p:spPr>
-        <p:txBody>
-          <a:bodyPr wrap="square">
-            <a:spAutoFit/>
-          </a:bodyPr>
-          <a:lstStyle/>
-          <a:p>
-            <a:pPr algn="ctr"/>
-            <a:r>
-              <a:rPr sz="3610" b="1" i="0">
+            <a:off x="640080" y="2052828"/>
+            <a:ext cx="10911535" cy="731520"/>
+          </a:xfrm>
+          <a:prstGeom prst="rect">
+            <a:avLst/>
+          </a:prstGeom>
+          <a:noFill/>
+        </p:spPr>
+        <p:txBody>
+          <a:bodyPr wrap="square">
+            <a:spAutoFit/>
+          </a:bodyPr>
+          <a:lstStyle/>
+          <a:p>
+            <a:pPr algn="ctr"/>
+            <a:r>
+              <a:rPr sz="3900" b="1" i="0">
                 <a:solidFill>
                   <a:srgbClr val="FFFFFF"/>
                 </a:solidFill>
@@ -3488,99 +3453,29 @@
         </p:nvSpPr>
         <p:spPr>
           <a:xfrm>
-            <a:off x="594360" y="2980944"/>
-            <a:ext cx="11002975" cy="347472"/>
-          </a:xfrm>
-          <a:prstGeom prst="rect">
-            <a:avLst/>
-          </a:prstGeom>
-          <a:noFill/>
-        </p:spPr>
-        <p:txBody>
-          <a:bodyPr wrap="square">
-            <a:spAutoFit/>
-          </a:bodyPr>
-          <a:lstStyle/>
-          <a:p>
-            <a:pPr algn="ctr"/>
-            <a:r>
-              <a:rPr sz="2200" b="0" i="1">
-                <a:solidFill>
-                  <a:srgbClr val="8C8C8C"/>
-                </a:solidFill>
-                <a:latin typeface="Arial"/>
-              </a:rPr>
-              <a:t/>
-            </a:r>
-          </a:p>
-        </p:txBody>
-      </p:sp>
-      <p:sp>
-        <p:nvSpPr>
-          <p:cNvPr id="4" name="TextBox 3"/>
-          <p:cNvSpPr txBox="1"/>
-          <p:nvPr/>
-        </p:nvSpPr>
-        <p:spPr>
-          <a:xfrm>
-            <a:off x="594360" y="3529584"/>
-            <a:ext cx="11002975" cy="685800"/>
-          </a:xfrm>
-          <a:prstGeom prst="rect">
-            <a:avLst/>
-          </a:prstGeom>
-          <a:noFill/>
-        </p:spPr>
-        <p:txBody>
-          <a:bodyPr wrap="square">
-            <a:spAutoFit/>
-          </a:bodyPr>
-          <a:lstStyle/>
-          <a:p>
-            <a:pPr algn="ctr"/>
-            <a:r>
-              <a:rPr sz="4400" b="1" i="0">
+            <a:off x="640080" y="2985516"/>
+            <a:ext cx="10911535" cy="731520"/>
+          </a:xfrm>
+          <a:prstGeom prst="rect">
+            <a:avLst/>
+          </a:prstGeom>
+          <a:noFill/>
+        </p:spPr>
+        <p:txBody>
+          <a:bodyPr wrap="square">
+            <a:spAutoFit/>
+          </a:bodyPr>
+          <a:lstStyle/>
+          <a:p>
+            <a:pPr algn="ctr"/>
+            <a:r>
+              <a:rPr sz="4800" b="1" i="0">
                 <a:solidFill>
                   <a:srgbClr val="FFFFFF"/>
                 </a:solidFill>
                 <a:latin typeface="Arial"/>
               </a:rPr>
               <a:t>Até que o dia amanheça</a:t>
-            </a:r>
-          </a:p>
-        </p:txBody>
-      </p:sp>
-      <p:sp>
-        <p:nvSpPr>
-          <p:cNvPr id="5" name="TextBox 4"/>
-          <p:cNvSpPr txBox="1"/>
-          <p:nvPr/>
-        </p:nvSpPr>
-        <p:spPr>
-          <a:xfrm>
-            <a:off x="594360" y="4251960"/>
-            <a:ext cx="11002975" cy="347472"/>
-          </a:xfrm>
-          <a:prstGeom prst="rect">
-            <a:avLst/>
-          </a:prstGeom>
-          <a:noFill/>
-        </p:spPr>
-        <p:txBody>
-          <a:bodyPr wrap="square">
-            <a:spAutoFit/>
-          </a:bodyPr>
-          <a:lstStyle/>
-          <a:p>
-            <a:pPr algn="ctr"/>
-            <a:r>
-              <a:rPr sz="2200" b="0" i="1">
-                <a:solidFill>
-                  <a:srgbClr val="8C8C8C"/>
-                </a:solidFill>
-                <a:latin typeface="Arial"/>
-              </a:rPr>
-              <a:t/>
             </a:r>
           </a:p>
         </p:txBody>
@@ -3619,23 +3514,23 @@
         </p:nvSpPr>
         <p:spPr>
           <a:xfrm>
-            <a:off x="594360" y="2258568"/>
-            <a:ext cx="11002975" cy="685800"/>
-          </a:xfrm>
-          <a:prstGeom prst="rect">
-            <a:avLst/>
-          </a:prstGeom>
-          <a:noFill/>
-        </p:spPr>
-        <p:txBody>
-          <a:bodyPr wrap="square">
-            <a:spAutoFit/>
-          </a:bodyPr>
-          <a:lstStyle/>
-          <a:p>
-            <a:pPr algn="ctr"/>
-            <a:r>
-              <a:rPr sz="4400" b="1" i="0">
+            <a:off x="640080" y="2052828"/>
+            <a:ext cx="10911535" cy="731520"/>
+          </a:xfrm>
+          <a:prstGeom prst="rect">
+            <a:avLst/>
+          </a:prstGeom>
+          <a:noFill/>
+        </p:spPr>
+        <p:txBody>
+          <a:bodyPr wrap="square">
+            <a:spAutoFit/>
+          </a:bodyPr>
+          <a:lstStyle/>
+          <a:p>
+            <a:pPr algn="ctr"/>
+            <a:r>
+              <a:rPr sz="4800" b="1" i="0">
                 <a:solidFill>
                   <a:srgbClr val="FFFFFF"/>
                 </a:solidFill>
@@ -3654,99 +3549,29 @@
         </p:nvSpPr>
         <p:spPr>
           <a:xfrm>
-            <a:off x="594360" y="2980944"/>
-            <a:ext cx="11002975" cy="347472"/>
-          </a:xfrm>
-          <a:prstGeom prst="rect">
-            <a:avLst/>
-          </a:prstGeom>
-          <a:noFill/>
-        </p:spPr>
-        <p:txBody>
-          <a:bodyPr wrap="square">
-            <a:spAutoFit/>
-          </a:bodyPr>
-          <a:lstStyle/>
-          <a:p>
-            <a:pPr algn="ctr"/>
-            <a:r>
-              <a:rPr sz="2200" b="0" i="1">
-                <a:solidFill>
-                  <a:srgbClr val="8C8C8C"/>
-                </a:solidFill>
-                <a:latin typeface="Arial"/>
-              </a:rPr>
-              <a:t/>
-            </a:r>
-          </a:p>
-        </p:txBody>
-      </p:sp>
-      <p:sp>
-        <p:nvSpPr>
-          <p:cNvPr id="4" name="TextBox 3"/>
-          <p:cNvSpPr txBox="1"/>
-          <p:nvPr/>
-        </p:nvSpPr>
-        <p:spPr>
-          <a:xfrm>
-            <a:off x="594360" y="3529584"/>
-            <a:ext cx="11002975" cy="685800"/>
-          </a:xfrm>
-          <a:prstGeom prst="rect">
-            <a:avLst/>
-          </a:prstGeom>
-          <a:noFill/>
-        </p:spPr>
-        <p:txBody>
-          <a:bodyPr wrap="square">
-            <a:spAutoFit/>
-          </a:bodyPr>
-          <a:lstStyle/>
-          <a:p>
-            <a:pPr algn="ctr"/>
-            <a:r>
-              <a:rPr sz="4400" b="1" i="0">
+            <a:off x="640080" y="2985516"/>
+            <a:ext cx="10911535" cy="731520"/>
+          </a:xfrm>
+          <a:prstGeom prst="rect">
+            <a:avLst/>
+          </a:prstGeom>
+          <a:noFill/>
+        </p:spPr>
+        <p:txBody>
+          <a:bodyPr wrap="square">
+            <a:spAutoFit/>
+          </a:bodyPr>
+          <a:lstStyle/>
+          <a:p>
+            <a:pPr algn="ctr"/>
+            <a:r>
+              <a:rPr sz="4800" b="1" i="0">
                 <a:solidFill>
                   <a:srgbClr val="FFFFFF"/>
                 </a:solidFill>
                 <a:latin typeface="Arial"/>
               </a:rPr>
               <a:t>Nós cantamos os louvores de Deus</a:t>
-            </a:r>
-          </a:p>
-        </p:txBody>
-      </p:sp>
-      <p:sp>
-        <p:nvSpPr>
-          <p:cNvPr id="5" name="TextBox 4"/>
-          <p:cNvSpPr txBox="1"/>
-          <p:nvPr/>
-        </p:nvSpPr>
-        <p:spPr>
-          <a:xfrm>
-            <a:off x="594360" y="4251960"/>
-            <a:ext cx="11002975" cy="347472"/>
-          </a:xfrm>
-          <a:prstGeom prst="rect">
-            <a:avLst/>
-          </a:prstGeom>
-          <a:noFill/>
-        </p:spPr>
-        <p:txBody>
-          <a:bodyPr wrap="square">
-            <a:spAutoFit/>
-          </a:bodyPr>
-          <a:lstStyle/>
-          <a:p>
-            <a:pPr algn="ctr"/>
-            <a:r>
-              <a:rPr sz="2200" b="0" i="1">
-                <a:solidFill>
-                  <a:srgbClr val="8C8C8C"/>
-                </a:solidFill>
-                <a:latin typeface="Arial"/>
-              </a:rPr>
-              <a:t/>
             </a:r>
           </a:p>
         </p:txBody>
@@ -3785,23 +3610,23 @@
         </p:nvSpPr>
         <p:spPr>
           <a:xfrm>
-            <a:off x="594360" y="1837944"/>
-            <a:ext cx="11002975" cy="685800"/>
-          </a:xfrm>
-          <a:prstGeom prst="rect">
-            <a:avLst/>
-          </a:prstGeom>
-          <a:noFill/>
-        </p:spPr>
-        <p:txBody>
-          <a:bodyPr wrap="square">
-            <a:spAutoFit/>
-          </a:bodyPr>
-          <a:lstStyle/>
-          <a:p>
-            <a:pPr algn="ctr"/>
-            <a:r>
-              <a:rPr sz="4400" b="1" i="0">
+            <a:off x="640080" y="1650492"/>
+            <a:ext cx="10911535" cy="731520"/>
+          </a:xfrm>
+          <a:prstGeom prst="rect">
+            <a:avLst/>
+          </a:prstGeom>
+          <a:noFill/>
+        </p:spPr>
+        <p:txBody>
+          <a:bodyPr wrap="square">
+            <a:spAutoFit/>
+          </a:bodyPr>
+          <a:lstStyle/>
+          <a:p>
+            <a:pPr algn="ctr"/>
+            <a:r>
+              <a:rPr sz="4800" b="1" i="0">
                 <a:solidFill>
                   <a:srgbClr val="FFFFFF"/>
                 </a:solidFill>
@@ -3820,8 +3645,8 @@
         </p:nvSpPr>
         <p:spPr>
           <a:xfrm>
-            <a:off x="594360" y="2560320"/>
-            <a:ext cx="11002975" cy="384048"/>
+            <a:off x="640080" y="2418588"/>
+            <a:ext cx="10911535" cy="365760"/>
           </a:xfrm>
           <a:prstGeom prst="rect">
             <a:avLst/>
@@ -3838,7 +3663,7 @@
             <a:r>
               <a:rPr sz="2400" b="0" i="1">
                 <a:solidFill>
-                  <a:srgbClr val="B4B4B4"/>
+                  <a:srgbClr val="AAAAAA"/>
                 </a:solidFill>
                 <a:latin typeface="Arial"/>
               </a:rPr>
@@ -3855,8 +3680,78 @@
         </p:nvSpPr>
         <p:spPr>
           <a:xfrm>
-            <a:off x="594360" y="2980944"/>
-            <a:ext cx="11002975" cy="347472"/>
+            <a:off x="640080" y="2985516"/>
+            <a:ext cx="10911535" cy="731520"/>
+          </a:xfrm>
+          <a:prstGeom prst="rect">
+            <a:avLst/>
+          </a:prstGeom>
+          <a:noFill/>
+        </p:spPr>
+        <p:txBody>
+          <a:bodyPr wrap="square">
+            <a:spAutoFit/>
+          </a:bodyPr>
+          <a:lstStyle/>
+          <a:p>
+            <a:pPr algn="ctr"/>
+            <a:r>
+              <a:rPr sz="4800" b="1" i="0">
+                <a:solidFill>
+                  <a:srgbClr val="FFFFFF"/>
+                </a:solidFill>
+                <a:latin typeface="Arial"/>
+              </a:rPr>
+              <a:t>信仰のヒーロー達と</a:t>
+            </a:r>
+          </a:p>
+        </p:txBody>
+      </p:sp>
+      <p:sp>
+        <p:nvSpPr>
+          <p:cNvPr id="5" name="TextBox 4"/>
+          <p:cNvSpPr txBox="1"/>
+          <p:nvPr/>
+        </p:nvSpPr>
+        <p:spPr>
+          <a:xfrm>
+            <a:off x="640080" y="3753612"/>
+            <a:ext cx="10911535" cy="365760"/>
+          </a:xfrm>
+          <a:prstGeom prst="rect">
+            <a:avLst/>
+          </a:prstGeom>
+          <a:noFill/>
+        </p:spPr>
+        <p:txBody>
+          <a:bodyPr wrap="square">
+            <a:spAutoFit/>
+          </a:bodyPr>
+          <a:lstStyle/>
+          <a:p>
+            <a:pPr algn="ctr"/>
+            <a:r>
+              <a:rPr sz="2400" b="0" i="1">
+                <a:solidFill>
+                  <a:srgbClr val="AAAAAA"/>
+                </a:solidFill>
+                <a:latin typeface="Arial"/>
+              </a:rPr>
+              <a:t>shinkouno hi-rou tachito</a:t>
+            </a:r>
+          </a:p>
+        </p:txBody>
+      </p:sp>
+      <p:sp>
+        <p:nvSpPr>
+          <p:cNvPr id="6" name="TextBox 5"/>
+          <p:cNvSpPr txBox="1"/>
+          <p:nvPr/>
+        </p:nvSpPr>
+        <p:spPr>
+          <a:xfrm>
+            <a:off x="640080" y="4530852"/>
+            <a:ext cx="10911535" cy="310896"/>
           </a:xfrm>
           <a:prstGeom prst="rect">
             <a:avLst/>
@@ -3873,81 +3768,11 @@
             <a:r>
               <a:rPr sz="2000" b="0" i="1">
                 <a:solidFill>
-                  <a:srgbClr val="8C8C8C"/>
-                </a:solidFill>
-                <a:latin typeface="Arial"/>
-              </a:rPr>
-              <a:t/>
-            </a:r>
-          </a:p>
-        </p:txBody>
-      </p:sp>
-      <p:sp>
-        <p:nvSpPr>
-          <p:cNvPr id="5" name="TextBox 4"/>
-          <p:cNvSpPr txBox="1"/>
-          <p:nvPr/>
-        </p:nvSpPr>
-        <p:spPr>
-          <a:xfrm>
-            <a:off x="594360" y="3529584"/>
-            <a:ext cx="11002975" cy="685800"/>
-          </a:xfrm>
-          <a:prstGeom prst="rect">
-            <a:avLst/>
-          </a:prstGeom>
-          <a:noFill/>
-        </p:spPr>
-        <p:txBody>
-          <a:bodyPr wrap="square">
-            <a:spAutoFit/>
-          </a:bodyPr>
-          <a:lstStyle/>
-          <a:p>
-            <a:pPr algn="ctr"/>
-            <a:r>
-              <a:rPr sz="4400" b="1" i="0">
-                <a:solidFill>
-                  <a:srgbClr val="FFFFFF"/>
-                </a:solidFill>
-                <a:latin typeface="Arial"/>
-              </a:rPr>
-              <a:t>信仰のヒーロー達と</a:t>
-            </a:r>
-          </a:p>
-        </p:txBody>
-      </p:sp>
-      <p:sp>
-        <p:nvSpPr>
-          <p:cNvPr id="6" name="TextBox 5"/>
-          <p:cNvSpPr txBox="1"/>
-          <p:nvPr/>
-        </p:nvSpPr>
-        <p:spPr>
-          <a:xfrm>
-            <a:off x="594360" y="4251960"/>
-            <a:ext cx="11002975" cy="384048"/>
-          </a:xfrm>
-          <a:prstGeom prst="rect">
-            <a:avLst/>
-          </a:prstGeom>
-          <a:noFill/>
-        </p:spPr>
-        <p:txBody>
-          <a:bodyPr wrap="square">
-            <a:spAutoFit/>
-          </a:bodyPr>
-          <a:lstStyle/>
-          <a:p>
-            <a:pPr algn="ctr"/>
-            <a:r>
-              <a:rPr sz="2400" b="0" i="1">
-                <a:solidFill>
-                  <a:srgbClr val="B4B4B4"/>
-                </a:solidFill>
-                <a:latin typeface="Arial"/>
-              </a:rPr>
-              <a:t>shinkouno hi-rou tachito</a:t>
+                  <a:srgbClr val="828282"/>
+                </a:solidFill>
+                <a:latin typeface="Arial"/>
+              </a:rPr>
+              <a:t>Onde a dor se foi e a misericórdia enche as ruas</a:t>
             </a:r>
           </a:p>
         </p:txBody>
@@ -3960,8 +3785,8 @@
         </p:nvSpPr>
         <p:spPr>
           <a:xfrm>
-            <a:off x="594360" y="4672584"/>
-            <a:ext cx="11002975" cy="347472"/>
+            <a:off x="640080" y="4896612"/>
+            <a:ext cx="10911535" cy="310896"/>
           </a:xfrm>
           <a:prstGeom prst="rect">
             <a:avLst/>
@@ -3978,11 +3803,11 @@
             <a:r>
               <a:rPr sz="2000" b="0" i="1">
                 <a:solidFill>
-                  <a:srgbClr val="8C8C8C"/>
-                </a:solidFill>
-                <a:latin typeface="Arial"/>
-              </a:rPr>
-              <a:t/>
+                  <a:srgbClr val="828282"/>
+                </a:solidFill>
+                <a:latin typeface="Arial"/>
+              </a:rPr>
+              <a:t>Para olhar para Aquele que sangrou para me salvar</a:t>
             </a:r>
           </a:p>
         </p:txBody>
@@ -4021,23 +3846,23 @@
         </p:nvSpPr>
         <p:spPr>
           <a:xfrm>
-            <a:off x="594360" y="1837944"/>
-            <a:ext cx="11002975" cy="685800"/>
-          </a:xfrm>
-          <a:prstGeom prst="rect">
-            <a:avLst/>
-          </a:prstGeom>
-          <a:noFill/>
-        </p:spPr>
-        <p:txBody>
-          <a:bodyPr wrap="square">
-            <a:spAutoFit/>
-          </a:bodyPr>
-          <a:lstStyle/>
-          <a:p>
-            <a:pPr algn="ctr"/>
-            <a:r>
-              <a:rPr sz="4400" b="1" i="0">
+            <a:off x="640080" y="1650492"/>
+            <a:ext cx="10911535" cy="731520"/>
+          </a:xfrm>
+          <a:prstGeom prst="rect">
+            <a:avLst/>
+          </a:prstGeom>
+          <a:noFill/>
+        </p:spPr>
+        <p:txBody>
+          <a:bodyPr wrap="square">
+            <a:spAutoFit/>
+          </a:bodyPr>
+          <a:lstStyle/>
+          <a:p>
+            <a:pPr algn="ctr"/>
+            <a:r>
+              <a:rPr sz="4800" b="1" i="0">
                 <a:solidFill>
                   <a:srgbClr val="FFFFFF"/>
                 </a:solidFill>
@@ -4056,8 +3881,8 @@
         </p:nvSpPr>
         <p:spPr>
           <a:xfrm>
-            <a:off x="594360" y="2560320"/>
-            <a:ext cx="11002975" cy="384048"/>
+            <a:off x="640080" y="2418588"/>
+            <a:ext cx="10911535" cy="365760"/>
           </a:xfrm>
           <a:prstGeom prst="rect">
             <a:avLst/>
@@ -4074,7 +3899,7 @@
             <a:r>
               <a:rPr sz="2400" b="0" i="1">
                 <a:solidFill>
-                  <a:srgbClr val="B4B4B4"/>
+                  <a:srgbClr val="AAAAAA"/>
                 </a:solidFill>
                 <a:latin typeface="Arial"/>
               </a:rPr>
@@ -4091,8 +3916,78 @@
         </p:nvSpPr>
         <p:spPr>
           <a:xfrm>
-            <a:off x="594360" y="2980944"/>
-            <a:ext cx="11002975" cy="347472"/>
+            <a:off x="640080" y="2985516"/>
+            <a:ext cx="10911535" cy="731520"/>
+          </a:xfrm>
+          <a:prstGeom prst="rect">
+            <a:avLst/>
+          </a:prstGeom>
+          <a:noFill/>
+        </p:spPr>
+        <p:txBody>
+          <a:bodyPr wrap="square">
+            <a:spAutoFit/>
+          </a:bodyPr>
+          <a:lstStyle/>
+          <a:p>
+            <a:pPr algn="ctr"/>
+            <a:r>
+              <a:rPr sz="4800" b="1" i="0">
+                <a:solidFill>
+                  <a:srgbClr val="FFFFFF"/>
+                </a:solidFill>
+                <a:latin typeface="Arial"/>
+              </a:rPr>
+              <a:t>歌う栄光を</a:t>
+            </a:r>
+          </a:p>
+        </p:txBody>
+      </p:sp>
+      <p:sp>
+        <p:nvSpPr>
+          <p:cNvPr id="5" name="TextBox 4"/>
+          <p:cNvSpPr txBox="1"/>
+          <p:nvPr/>
+        </p:nvSpPr>
+        <p:spPr>
+          <a:xfrm>
+            <a:off x="640080" y="3753612"/>
+            <a:ext cx="10911535" cy="365760"/>
+          </a:xfrm>
+          <a:prstGeom prst="rect">
+            <a:avLst/>
+          </a:prstGeom>
+          <a:noFill/>
+        </p:spPr>
+        <p:txBody>
+          <a:bodyPr wrap="square">
+            <a:spAutoFit/>
+          </a:bodyPr>
+          <a:lstStyle/>
+          <a:p>
+            <a:pPr algn="ctr"/>
+            <a:r>
+              <a:rPr sz="2400" b="0" i="1">
+                <a:solidFill>
+                  <a:srgbClr val="AAAAAA"/>
+                </a:solidFill>
+                <a:latin typeface="Arial"/>
+              </a:rPr>
+              <a:t>utau eikou wo</a:t>
+            </a:r>
+          </a:p>
+        </p:txBody>
+      </p:sp>
+      <p:sp>
+        <p:nvSpPr>
+          <p:cNvPr id="6" name="TextBox 5"/>
+          <p:cNvSpPr txBox="1"/>
+          <p:nvPr/>
+        </p:nvSpPr>
+        <p:spPr>
+          <a:xfrm>
+            <a:off x="640080" y="4530852"/>
+            <a:ext cx="10911535" cy="310896"/>
           </a:xfrm>
           <a:prstGeom prst="rect">
             <a:avLst/>
@@ -4109,81 +4004,11 @@
             <a:r>
               <a:rPr sz="2000" b="0" i="1">
                 <a:solidFill>
-                  <a:srgbClr val="8C8C8C"/>
-                </a:solidFill>
-                <a:latin typeface="Arial"/>
-              </a:rPr>
-              <a:t/>
-            </a:r>
-          </a:p>
-        </p:txBody>
-      </p:sp>
-      <p:sp>
-        <p:nvSpPr>
-          <p:cNvPr id="5" name="TextBox 4"/>
-          <p:cNvSpPr txBox="1"/>
-          <p:nvPr/>
-        </p:nvSpPr>
-        <p:spPr>
-          <a:xfrm>
-            <a:off x="594360" y="3529584"/>
-            <a:ext cx="11002975" cy="685800"/>
-          </a:xfrm>
-          <a:prstGeom prst="rect">
-            <a:avLst/>
-          </a:prstGeom>
-          <a:noFill/>
-        </p:spPr>
-        <p:txBody>
-          <a:bodyPr wrap="square">
-            <a:spAutoFit/>
-          </a:bodyPr>
-          <a:lstStyle/>
-          <a:p>
-            <a:pPr algn="ctr"/>
-            <a:r>
-              <a:rPr sz="4400" b="1" i="0">
-                <a:solidFill>
-                  <a:srgbClr val="FFFFFF"/>
-                </a:solidFill>
-                <a:latin typeface="Arial"/>
-              </a:rPr>
-              <a:t>歌う栄光を</a:t>
-            </a:r>
-          </a:p>
-        </p:txBody>
-      </p:sp>
-      <p:sp>
-        <p:nvSpPr>
-          <p:cNvPr id="6" name="TextBox 5"/>
-          <p:cNvSpPr txBox="1"/>
-          <p:nvPr/>
-        </p:nvSpPr>
-        <p:spPr>
-          <a:xfrm>
-            <a:off x="594360" y="4251960"/>
-            <a:ext cx="11002975" cy="384048"/>
-          </a:xfrm>
-          <a:prstGeom prst="rect">
-            <a:avLst/>
-          </a:prstGeom>
-          <a:noFill/>
-        </p:spPr>
-        <p:txBody>
-          <a:bodyPr wrap="square">
-            <a:spAutoFit/>
-          </a:bodyPr>
-          <a:lstStyle/>
-          <a:p>
-            <a:pPr algn="ctr"/>
-            <a:r>
-              <a:rPr sz="2400" b="0" i="1">
-                <a:solidFill>
-                  <a:srgbClr val="B4B4B4"/>
-                </a:solidFill>
-                <a:latin typeface="Arial"/>
-              </a:rPr>
-              <a:t>utau eikou wo</a:t>
+                  <a:srgbClr val="828282"/>
+                </a:solidFill>
+                <a:latin typeface="Arial"/>
+              </a:rPr>
+              <a:t>Para andar com Ele por toda a eternidade</a:t>
             </a:r>
           </a:p>
         </p:txBody>
@@ -4196,8 +4021,8 @@
         </p:nvSpPr>
         <p:spPr>
           <a:xfrm>
-            <a:off x="594360" y="4672584"/>
-            <a:ext cx="11002975" cy="347472"/>
+            <a:off x="640080" y="4896612"/>
+            <a:ext cx="10911535" cy="310896"/>
           </a:xfrm>
           <a:prstGeom prst="rect">
             <a:avLst/>
@@ -4214,11 +4039,11 @@
             <a:r>
               <a:rPr sz="2000" b="0" i="1">
                 <a:solidFill>
-                  <a:srgbClr val="8C8C8C"/>
-                </a:solidFill>
-                <a:latin typeface="Arial"/>
-              </a:rPr>
-              <a:t/>
+                  <a:srgbClr val="828282"/>
+                </a:solidFill>
+                <a:latin typeface="Arial"/>
+              </a:rPr>
+              <a:t>Oh, haverá um dia em que todos se prostrarão diante Dele</a:t>
             </a:r>
           </a:p>
         </p:txBody>
@@ -4257,23 +4082,23 @@
         </p:nvSpPr>
         <p:spPr>
           <a:xfrm>
-            <a:off x="594360" y="2683764"/>
-            <a:ext cx="11002975" cy="685800"/>
-          </a:xfrm>
-          <a:prstGeom prst="rect">
-            <a:avLst/>
-          </a:prstGeom>
-          <a:noFill/>
-        </p:spPr>
-        <p:txBody>
-          <a:bodyPr wrap="square">
-            <a:spAutoFit/>
-          </a:bodyPr>
-          <a:lstStyle/>
-          <a:p>
-            <a:pPr algn="ctr"/>
-            <a:r>
-              <a:rPr sz="4400" b="1" i="0">
+            <a:off x="640080" y="2500884"/>
+            <a:ext cx="10911535" cy="731520"/>
+          </a:xfrm>
+          <a:prstGeom prst="rect">
+            <a:avLst/>
+          </a:prstGeom>
+          <a:noFill/>
+        </p:spPr>
+        <p:txBody>
+          <a:bodyPr wrap="square">
+            <a:spAutoFit/>
+          </a:bodyPr>
+          <a:lstStyle/>
+          <a:p>
+            <a:pPr algn="ctr"/>
+            <a:r>
+              <a:rPr sz="4800" b="1" i="0">
                 <a:solidFill>
                   <a:srgbClr val="FFFFFF"/>
                 </a:solidFill>
@@ -4292,8 +4117,8 @@
         </p:nvSpPr>
         <p:spPr>
           <a:xfrm>
-            <a:off x="594360" y="3406140"/>
-            <a:ext cx="11002975" cy="384048"/>
+            <a:off x="640080" y="3268980"/>
+            <a:ext cx="10911535" cy="365760"/>
           </a:xfrm>
           <a:prstGeom prst="rect">
             <a:avLst/>
@@ -4310,46 +4135,11 @@
             <a:r>
               <a:rPr sz="2400" b="0" i="1">
                 <a:solidFill>
-                  <a:srgbClr val="B4B4B4"/>
+                  <a:srgbClr val="AAAAAA"/>
                 </a:solidFill>
                 <a:latin typeface="Arial"/>
               </a:rPr>
               <a:t>towani osameru katani</a:t>
-            </a:r>
-          </a:p>
-        </p:txBody>
-      </p:sp>
-      <p:sp>
-        <p:nvSpPr>
-          <p:cNvPr id="4" name="TextBox 3"/>
-          <p:cNvSpPr txBox="1"/>
-          <p:nvPr/>
-        </p:nvSpPr>
-        <p:spPr>
-          <a:xfrm>
-            <a:off x="594360" y="3826764"/>
-            <a:ext cx="11002975" cy="347472"/>
-          </a:xfrm>
-          <a:prstGeom prst="rect">
-            <a:avLst/>
-          </a:prstGeom>
-          <a:noFill/>
-        </p:spPr>
-        <p:txBody>
-          <a:bodyPr wrap="square">
-            <a:spAutoFit/>
-          </a:bodyPr>
-          <a:lstStyle/>
-          <a:p>
-            <a:pPr algn="ctr"/>
-            <a:r>
-              <a:rPr sz="2000" b="0" i="1">
-                <a:solidFill>
-                  <a:srgbClr val="8C8C8C"/>
-                </a:solidFill>
-                <a:latin typeface="Arial"/>
-              </a:rPr>
-              <a:t/>
             </a:r>
           </a:p>
         </p:txBody>
@@ -4388,23 +4178,23 @@
         </p:nvSpPr>
         <p:spPr>
           <a:xfrm>
-            <a:off x="594360" y="1837944"/>
-            <a:ext cx="11002975" cy="685800"/>
-          </a:xfrm>
-          <a:prstGeom prst="rect">
-            <a:avLst/>
-          </a:prstGeom>
-          <a:noFill/>
-        </p:spPr>
-        <p:txBody>
-          <a:bodyPr wrap="square">
-            <a:spAutoFit/>
-          </a:bodyPr>
-          <a:lstStyle/>
-          <a:p>
-            <a:pPr algn="ctr"/>
-            <a:r>
-              <a:rPr sz="4400" b="1" i="0">
+            <a:off x="640080" y="1650492"/>
+            <a:ext cx="10911535" cy="731520"/>
+          </a:xfrm>
+          <a:prstGeom prst="rect">
+            <a:avLst/>
+          </a:prstGeom>
+          <a:noFill/>
+        </p:spPr>
+        <p:txBody>
+          <a:bodyPr wrap="square">
+            <a:spAutoFit/>
+          </a:bodyPr>
+          <a:lstStyle/>
+          <a:p>
+            <a:pPr algn="ctr"/>
+            <a:r>
+              <a:rPr sz="4800" b="1" i="0">
                 <a:solidFill>
                   <a:srgbClr val="FFFFFF"/>
                 </a:solidFill>
@@ -4423,8 +4213,8 @@
         </p:nvSpPr>
         <p:spPr>
           <a:xfrm>
-            <a:off x="594360" y="2560320"/>
-            <a:ext cx="11002975" cy="384048"/>
+            <a:off x="640080" y="2418588"/>
+            <a:ext cx="10911535" cy="365760"/>
           </a:xfrm>
           <a:prstGeom prst="rect">
             <a:avLst/>
@@ -4441,7 +4231,7 @@
             <a:r>
               <a:rPr sz="2400" b="0" i="1">
                 <a:solidFill>
-                  <a:srgbClr val="B4B4B4"/>
+                  <a:srgbClr val="AAAAAA"/>
                 </a:solidFill>
                 <a:latin typeface="Arial"/>
               </a:rPr>
@@ -4458,8 +4248,78 @@
         </p:nvSpPr>
         <p:spPr>
           <a:xfrm>
-            <a:off x="594360" y="2980944"/>
-            <a:ext cx="11002975" cy="347472"/>
+            <a:off x="640080" y="2985516"/>
+            <a:ext cx="10911535" cy="731520"/>
+          </a:xfrm>
+          <a:prstGeom prst="rect">
+            <a:avLst/>
+          </a:prstGeom>
+          <a:noFill/>
+        </p:spPr>
+        <p:txBody>
+          <a:bodyPr wrap="square">
+            <a:spAutoFit/>
+          </a:bodyPr>
+          <a:lstStyle/>
+          <a:p>
+            <a:pPr algn="ctr"/>
+            <a:r>
+              <a:rPr sz="4800" b="1" i="0">
+                <a:solidFill>
+                  <a:srgbClr val="FFFFFF"/>
+                </a:solidFill>
+                <a:latin typeface="Arial"/>
+              </a:rPr>
+              <a:t>天国の賛美歌を</a:t>
+            </a:r>
+          </a:p>
+        </p:txBody>
+      </p:sp>
+      <p:sp>
+        <p:nvSpPr>
+          <p:cNvPr id="5" name="TextBox 4"/>
+          <p:cNvSpPr txBox="1"/>
+          <p:nvPr/>
+        </p:nvSpPr>
+        <p:spPr>
+          <a:xfrm>
+            <a:off x="640080" y="3753612"/>
+            <a:ext cx="10911535" cy="365760"/>
+          </a:xfrm>
+          <a:prstGeom prst="rect">
+            <a:avLst/>
+          </a:prstGeom>
+          <a:noFill/>
+        </p:spPr>
+        <p:txBody>
+          <a:bodyPr wrap="square">
+            <a:spAutoFit/>
+          </a:bodyPr>
+          <a:lstStyle/>
+          <a:p>
+            <a:pPr algn="ctr"/>
+            <a:r>
+              <a:rPr sz="2400" b="0" i="1">
+                <a:solidFill>
+                  <a:srgbClr val="AAAAAA"/>
+                </a:solidFill>
+                <a:latin typeface="Arial"/>
+              </a:rPr>
+              <a:t>tengokuno sanbikawo</a:t>
+            </a:r>
+          </a:p>
+        </p:txBody>
+      </p:sp>
+      <p:sp>
+        <p:nvSpPr>
+          <p:cNvPr id="6" name="TextBox 5"/>
+          <p:cNvSpPr txBox="1"/>
+          <p:nvPr/>
+        </p:nvSpPr>
+        <p:spPr>
+          <a:xfrm>
+            <a:off x="640080" y="4530852"/>
+            <a:ext cx="10911535" cy="310896"/>
           </a:xfrm>
           <a:prstGeom prst="rect">
             <a:avLst/>
@@ -4476,81 +4336,11 @@
             <a:r>
               <a:rPr sz="2000" b="0" i="1">
                 <a:solidFill>
-                  <a:srgbClr val="8C8C8C"/>
-                </a:solidFill>
-                <a:latin typeface="Arial"/>
-              </a:rPr>
-              <a:t/>
-            </a:r>
-          </a:p>
-        </p:txBody>
-      </p:sp>
-      <p:sp>
-        <p:nvSpPr>
-          <p:cNvPr id="5" name="TextBox 4"/>
-          <p:cNvSpPr txBox="1"/>
-          <p:nvPr/>
-        </p:nvSpPr>
-        <p:spPr>
-          <a:xfrm>
-            <a:off x="594360" y="3529584"/>
-            <a:ext cx="11002975" cy="685800"/>
-          </a:xfrm>
-          <a:prstGeom prst="rect">
-            <a:avLst/>
-          </a:prstGeom>
-          <a:noFill/>
-        </p:spPr>
-        <p:txBody>
-          <a:bodyPr wrap="square">
-            <a:spAutoFit/>
-          </a:bodyPr>
-          <a:lstStyle/>
-          <a:p>
-            <a:pPr algn="ctr"/>
-            <a:r>
-              <a:rPr sz="4400" b="1" i="0">
-                <a:solidFill>
-                  <a:srgbClr val="FFFFFF"/>
-                </a:solidFill>
-                <a:latin typeface="Arial"/>
-              </a:rPr>
-              <a:t>天国の賛美歌を</a:t>
-            </a:r>
-          </a:p>
-        </p:txBody>
-      </p:sp>
-      <p:sp>
-        <p:nvSpPr>
-          <p:cNvPr id="6" name="TextBox 5"/>
-          <p:cNvSpPr txBox="1"/>
-          <p:nvPr/>
-        </p:nvSpPr>
-        <p:spPr>
-          <a:xfrm>
-            <a:off x="594360" y="4251960"/>
-            <a:ext cx="11002975" cy="384048"/>
-          </a:xfrm>
-          <a:prstGeom prst="rect">
-            <a:avLst/>
-          </a:prstGeom>
-          <a:noFill/>
-        </p:spPr>
-        <p:txBody>
-          <a:bodyPr wrap="square">
-            <a:spAutoFit/>
-          </a:bodyPr>
-          <a:lstStyle/>
-          <a:p>
-            <a:pPr algn="ctr"/>
-            <a:r>
-              <a:rPr sz="2400" b="0" i="1">
-                <a:solidFill>
-                  <a:srgbClr val="B4B4B4"/>
-                </a:solidFill>
-                <a:latin typeface="Arial"/>
-              </a:rPr>
-              <a:t>tengokuno sanbikawo</a:t>
+                  <a:srgbClr val="828282"/>
+                </a:solidFill>
+                <a:latin typeface="Arial"/>
+              </a:rPr>
+              <a:t>Haverá um dia em que a morte não existirá mais</a:t>
             </a:r>
           </a:p>
         </p:txBody>
@@ -4563,8 +4353,8 @@
         </p:nvSpPr>
         <p:spPr>
           <a:xfrm>
-            <a:off x="594360" y="4672584"/>
-            <a:ext cx="11002975" cy="347472"/>
+            <a:off x="640080" y="4896612"/>
+            <a:ext cx="10911535" cy="310896"/>
           </a:xfrm>
           <a:prstGeom prst="rect">
             <a:avLst/>
@@ -4581,11 +4371,11 @@
             <a:r>
               <a:rPr sz="2000" b="0" i="1">
                 <a:solidFill>
-                  <a:srgbClr val="8C8C8C"/>
-                </a:solidFill>
-                <a:latin typeface="Arial"/>
-              </a:rPr>
-              <a:t/>
+                  <a:srgbClr val="828282"/>
+                </a:solidFill>
+                <a:latin typeface="Arial"/>
+              </a:rPr>
+              <a:t>Haverá um dia quando todo joelho se dobrará</a:t>
             </a:r>
           </a:p>
         </p:txBody>
@@ -4624,23 +4414,23 @@
         </p:nvSpPr>
         <p:spPr>
           <a:xfrm>
-            <a:off x="594360" y="1837944"/>
-            <a:ext cx="11002975" cy="685800"/>
-          </a:xfrm>
-          <a:prstGeom prst="rect">
-            <a:avLst/>
-          </a:prstGeom>
-          <a:noFill/>
-        </p:spPr>
-        <p:txBody>
-          <a:bodyPr wrap="square">
-            <a:spAutoFit/>
-          </a:bodyPr>
-          <a:lstStyle/>
-          <a:p>
-            <a:pPr algn="ctr"/>
-            <a:r>
-              <a:rPr sz="4400" b="1" i="0">
+            <a:off x="640080" y="1650492"/>
+            <a:ext cx="10911535" cy="731520"/>
+          </a:xfrm>
+          <a:prstGeom prst="rect">
+            <a:avLst/>
+          </a:prstGeom>
+          <a:noFill/>
+        </p:spPr>
+        <p:txBody>
+          <a:bodyPr wrap="square">
+            <a:spAutoFit/>
+          </a:bodyPr>
+          <a:lstStyle/>
+          <a:p>
+            <a:pPr algn="ctr"/>
+            <a:r>
+              <a:rPr sz="4800" b="1" i="0">
                 <a:solidFill>
                   <a:srgbClr val="FFFFFF"/>
                 </a:solidFill>
@@ -4659,8 +4449,8 @@
         </p:nvSpPr>
         <p:spPr>
           <a:xfrm>
-            <a:off x="594360" y="2560320"/>
-            <a:ext cx="11002975" cy="384048"/>
+            <a:off x="640080" y="2418588"/>
+            <a:ext cx="10911535" cy="365760"/>
           </a:xfrm>
           <a:prstGeom prst="rect">
             <a:avLst/>
@@ -4677,7 +4467,7 @@
             <a:r>
               <a:rPr sz="2400" b="0" i="1">
                 <a:solidFill>
-                  <a:srgbClr val="B4B4B4"/>
+                  <a:srgbClr val="AAAAAA"/>
                 </a:solidFill>
                 <a:latin typeface="Arial"/>
               </a:rPr>
@@ -4694,8 +4484,78 @@
         </p:nvSpPr>
         <p:spPr>
           <a:xfrm>
-            <a:off x="594360" y="2980944"/>
-            <a:ext cx="11002975" cy="347472"/>
+            <a:off x="640080" y="2985516"/>
+            <a:ext cx="10911535" cy="731520"/>
+          </a:xfrm>
+          <a:prstGeom prst="rect">
+            <a:avLst/>
+          </a:prstGeom>
+          <a:noFill/>
+        </p:spPr>
+        <p:txBody>
+          <a:bodyPr wrap="square">
+            <a:spAutoFit/>
+          </a:bodyPr>
+          <a:lstStyle/>
+          <a:p>
+            <a:pPr algn="ctr"/>
+            <a:r>
+              <a:rPr sz="4800" b="1" i="0">
+                <a:solidFill>
+                  <a:srgbClr val="FFFFFF"/>
+                </a:solidFill>
+                <a:latin typeface="Arial"/>
+              </a:rPr>
+              <a:t>聖なる　主よ</a:t>
+            </a:r>
+          </a:p>
+        </p:txBody>
+      </p:sp>
+      <p:sp>
+        <p:nvSpPr>
+          <p:cNvPr id="5" name="TextBox 4"/>
+          <p:cNvSpPr txBox="1"/>
+          <p:nvPr/>
+        </p:nvSpPr>
+        <p:spPr>
+          <a:xfrm>
+            <a:off x="640080" y="3753612"/>
+            <a:ext cx="10911535" cy="365760"/>
+          </a:xfrm>
+          <a:prstGeom prst="rect">
+            <a:avLst/>
+          </a:prstGeom>
+          <a:noFill/>
+        </p:spPr>
+        <p:txBody>
+          <a:bodyPr wrap="square">
+            <a:spAutoFit/>
+          </a:bodyPr>
+          <a:lstStyle/>
+          <a:p>
+            <a:pPr algn="ctr"/>
+            <a:r>
+              <a:rPr sz="2400" b="0" i="1">
+                <a:solidFill>
+                  <a:srgbClr val="AAAAAA"/>
+                </a:solidFill>
+                <a:latin typeface="Arial"/>
+              </a:rPr>
+              <a:t>Seinaru shuyo</a:t>
+            </a:r>
+          </a:p>
+        </p:txBody>
+      </p:sp>
+      <p:sp>
+        <p:nvSpPr>
+          <p:cNvPr id="6" name="TextBox 5"/>
+          <p:cNvSpPr txBox="1"/>
+          <p:nvPr/>
+        </p:nvSpPr>
+        <p:spPr>
+          <a:xfrm>
+            <a:off x="640080" y="4530852"/>
+            <a:ext cx="10911535" cy="310896"/>
           </a:xfrm>
           <a:prstGeom prst="rect">
             <a:avLst/>
@@ -4712,81 +4572,11 @@
             <a:r>
               <a:rPr sz="2000" b="0" i="1">
                 <a:solidFill>
-                  <a:srgbClr val="8C8C8C"/>
-                </a:solidFill>
-                <a:latin typeface="Arial"/>
-              </a:rPr>
-              <a:t/>
-            </a:r>
-          </a:p>
-        </p:txBody>
-      </p:sp>
-      <p:sp>
-        <p:nvSpPr>
-          <p:cNvPr id="5" name="TextBox 4"/>
-          <p:cNvSpPr txBox="1"/>
-          <p:nvPr/>
-        </p:nvSpPr>
-        <p:spPr>
-          <a:xfrm>
-            <a:off x="594360" y="3529584"/>
-            <a:ext cx="11002975" cy="685800"/>
-          </a:xfrm>
-          <a:prstGeom prst="rect">
-            <a:avLst/>
-          </a:prstGeom>
-          <a:noFill/>
-        </p:spPr>
-        <p:txBody>
-          <a:bodyPr wrap="square">
-            <a:spAutoFit/>
-          </a:bodyPr>
-          <a:lstStyle/>
-          <a:p>
-            <a:pPr algn="ctr"/>
-            <a:r>
-              <a:rPr sz="4400" b="1" i="0">
-                <a:solidFill>
-                  <a:srgbClr val="FFFFFF"/>
-                </a:solidFill>
-                <a:latin typeface="Arial"/>
-              </a:rPr>
-              <a:t>聖なる　主よ</a:t>
-            </a:r>
-          </a:p>
-        </p:txBody>
-      </p:sp>
-      <p:sp>
-        <p:nvSpPr>
-          <p:cNvPr id="6" name="TextBox 5"/>
-          <p:cNvSpPr txBox="1"/>
-          <p:nvPr/>
-        </p:nvSpPr>
-        <p:spPr>
-          <a:xfrm>
-            <a:off x="594360" y="4251960"/>
-            <a:ext cx="11002975" cy="384048"/>
-          </a:xfrm>
-          <a:prstGeom prst="rect">
-            <a:avLst/>
-          </a:prstGeom>
-          <a:noFill/>
-        </p:spPr>
-        <p:txBody>
-          <a:bodyPr wrap="square">
-            <a:spAutoFit/>
-          </a:bodyPr>
-          <a:lstStyle/>
-          <a:p>
-            <a:pPr algn="ctr"/>
-            <a:r>
-              <a:rPr sz="2400" b="0" i="1">
-                <a:solidFill>
-                  <a:srgbClr val="B4B4B4"/>
-                </a:solidFill>
-                <a:latin typeface="Arial"/>
-              </a:rPr>
-              <a:t>Seinaru shuyo</a:t>
+                  <a:srgbClr val="828282"/>
+                </a:solidFill>
+                <a:latin typeface="Arial"/>
+              </a:rPr>
+              <a:t>E todo ser criado cantará</a:t>
             </a:r>
           </a:p>
         </p:txBody>
@@ -4799,8 +4589,8 @@
         </p:nvSpPr>
         <p:spPr>
           <a:xfrm>
-            <a:off x="594360" y="4672584"/>
-            <a:ext cx="11002975" cy="347472"/>
+            <a:off x="640080" y="4896612"/>
+            <a:ext cx="10911535" cy="310896"/>
           </a:xfrm>
           <a:prstGeom prst="rect">
             <a:avLst/>
@@ -4817,11 +4607,11 @@
             <a:r>
               <a:rPr sz="2000" b="0" i="1">
                 <a:solidFill>
-                  <a:srgbClr val="8C8C8C"/>
-                </a:solidFill>
-                <a:latin typeface="Arial"/>
-              </a:rPr>
-              <a:t/>
+                  <a:srgbClr val="828282"/>
+                </a:solidFill>
+                <a:latin typeface="Arial"/>
+              </a:rPr>
+              <a:t>Santo, santo, santo é o Senhor</a:t>
             </a:r>
           </a:p>
         </p:txBody>
@@ -4860,23 +4650,23 @@
         </p:nvSpPr>
         <p:spPr>
           <a:xfrm>
-            <a:off x="594360" y="1837944"/>
-            <a:ext cx="11002975" cy="685800"/>
-          </a:xfrm>
-          <a:prstGeom prst="rect">
-            <a:avLst/>
-          </a:prstGeom>
-          <a:noFill/>
-        </p:spPr>
-        <p:txBody>
-          <a:bodyPr wrap="square">
-            <a:spAutoFit/>
-          </a:bodyPr>
-          <a:lstStyle/>
-          <a:p>
-            <a:pPr algn="ctr"/>
-            <a:r>
-              <a:rPr sz="4400" b="1" i="0">
+            <a:off x="640080" y="1650492"/>
+            <a:ext cx="10911535" cy="731520"/>
+          </a:xfrm>
+          <a:prstGeom prst="rect">
+            <a:avLst/>
+          </a:prstGeom>
+          <a:noFill/>
+        </p:spPr>
+        <p:txBody>
+          <a:bodyPr wrap="square">
+            <a:spAutoFit/>
+          </a:bodyPr>
+          <a:lstStyle/>
+          <a:p>
+            <a:pPr algn="ctr"/>
+            <a:r>
+              <a:rPr sz="4800" b="1" i="0">
                 <a:solidFill>
                   <a:srgbClr val="FFFFFF"/>
                 </a:solidFill>
@@ -4895,8 +4685,8 @@
         </p:nvSpPr>
         <p:spPr>
           <a:xfrm>
-            <a:off x="594360" y="2560320"/>
-            <a:ext cx="11002975" cy="384048"/>
+            <a:off x="640080" y="2418588"/>
+            <a:ext cx="10911535" cy="365760"/>
           </a:xfrm>
           <a:prstGeom prst="rect">
             <a:avLst/>
@@ -4913,7 +4703,7 @@
             <a:r>
               <a:rPr sz="2400" b="0" i="1">
                 <a:solidFill>
-                  <a:srgbClr val="B4B4B4"/>
+                  <a:srgbClr val="AAAAAA"/>
                 </a:solidFill>
                 <a:latin typeface="Arial"/>
               </a:rPr>
@@ -4930,29 +4720,29 @@
         </p:nvSpPr>
         <p:spPr>
           <a:xfrm>
-            <a:off x="594360" y="2980944"/>
-            <a:ext cx="11002975" cy="347472"/>
-          </a:xfrm>
-          <a:prstGeom prst="rect">
-            <a:avLst/>
-          </a:prstGeom>
-          <a:noFill/>
-        </p:spPr>
-        <p:txBody>
-          <a:bodyPr wrap="square">
-            <a:spAutoFit/>
-          </a:bodyPr>
-          <a:lstStyle/>
-          <a:p>
-            <a:pPr algn="ctr"/>
-            <a:r>
-              <a:rPr sz="2000" b="0" i="1">
-                <a:solidFill>
-                  <a:srgbClr val="8C8C8C"/>
-                </a:solidFill>
-                <a:latin typeface="Arial"/>
-              </a:rPr>
-              <a:t/>
+            <a:off x="640080" y="2985516"/>
+            <a:ext cx="10911535" cy="731520"/>
+          </a:xfrm>
+          <a:prstGeom prst="rect">
+            <a:avLst/>
+          </a:prstGeom>
+          <a:noFill/>
+        </p:spPr>
+        <p:txBody>
+          <a:bodyPr wrap="square">
+            <a:spAutoFit/>
+          </a:bodyPr>
+          <a:lstStyle/>
+          <a:p>
+            <a:pPr algn="ctr"/>
+            <a:r>
+              <a:rPr sz="4800" b="1" i="0">
+                <a:solidFill>
+                  <a:srgbClr val="FFFFFF"/>
+                </a:solidFill>
+                <a:latin typeface="Arial"/>
+              </a:rPr>
+              <a:t>聖なる　主よ</a:t>
             </a:r>
           </a:p>
         </p:txBody>
@@ -4965,43 +4755,8 @@
         </p:nvSpPr>
         <p:spPr>
           <a:xfrm>
-            <a:off x="594360" y="3529584"/>
-            <a:ext cx="11002975" cy="685800"/>
-          </a:xfrm>
-          <a:prstGeom prst="rect">
-            <a:avLst/>
-          </a:prstGeom>
-          <a:noFill/>
-        </p:spPr>
-        <p:txBody>
-          <a:bodyPr wrap="square">
-            <a:spAutoFit/>
-          </a:bodyPr>
-          <a:lstStyle/>
-          <a:p>
-            <a:pPr algn="ctr"/>
-            <a:r>
-              <a:rPr sz="4400" b="1" i="0">
-                <a:solidFill>
-                  <a:srgbClr val="FFFFFF"/>
-                </a:solidFill>
-                <a:latin typeface="Arial"/>
-              </a:rPr>
-              <a:t>聖なる　主よ</a:t>
-            </a:r>
-          </a:p>
-        </p:txBody>
-      </p:sp>
-      <p:sp>
-        <p:nvSpPr>
-          <p:cNvPr id="6" name="TextBox 5"/>
-          <p:cNvSpPr txBox="1"/>
-          <p:nvPr/>
-        </p:nvSpPr>
-        <p:spPr>
-          <a:xfrm>
-            <a:off x="594360" y="4251960"/>
-            <a:ext cx="11002975" cy="384048"/>
+            <a:off x="640080" y="3753612"/>
+            <a:ext cx="10911535" cy="365760"/>
           </a:xfrm>
           <a:prstGeom prst="rect">
             <a:avLst/>
@@ -5018,46 +4773,11 @@
             <a:r>
               <a:rPr sz="2400" b="0" i="1">
                 <a:solidFill>
-                  <a:srgbClr val="B4B4B4"/>
+                  <a:srgbClr val="AAAAAA"/>
                 </a:solidFill>
                 <a:latin typeface="Arial"/>
               </a:rPr>
               <a:t>Seinaru shuyo</a:t>
-            </a:r>
-          </a:p>
-        </p:txBody>
-      </p:sp>
-      <p:sp>
-        <p:nvSpPr>
-          <p:cNvPr id="7" name="TextBox 6"/>
-          <p:cNvSpPr txBox="1"/>
-          <p:nvPr/>
-        </p:nvSpPr>
-        <p:spPr>
-          <a:xfrm>
-            <a:off x="594360" y="4672584"/>
-            <a:ext cx="11002975" cy="347472"/>
-          </a:xfrm>
-          <a:prstGeom prst="rect">
-            <a:avLst/>
-          </a:prstGeom>
-          <a:noFill/>
-        </p:spPr>
-        <p:txBody>
-          <a:bodyPr wrap="square">
-            <a:spAutoFit/>
-          </a:bodyPr>
-          <a:lstStyle/>
-          <a:p>
-            <a:pPr algn="ctr"/>
-            <a:r>
-              <a:rPr sz="2000" b="0" i="1">
-                <a:solidFill>
-                  <a:srgbClr val="8C8C8C"/>
-                </a:solidFill>
-                <a:latin typeface="Arial"/>
-              </a:rPr>
-              <a:t/>
             </a:r>
           </a:p>
         </p:txBody>
@@ -5096,23 +4816,23 @@
         </p:nvSpPr>
         <p:spPr>
           <a:xfrm>
-            <a:off x="594360" y="1837944"/>
-            <a:ext cx="11002975" cy="685800"/>
-          </a:xfrm>
-          <a:prstGeom prst="rect">
-            <a:avLst/>
-          </a:prstGeom>
-          <a:noFill/>
-        </p:spPr>
-        <p:txBody>
-          <a:bodyPr wrap="square">
-            <a:spAutoFit/>
-          </a:bodyPr>
-          <a:lstStyle/>
-          <a:p>
-            <a:pPr algn="ctr"/>
-            <a:r>
-              <a:rPr sz="4400" b="1" i="0">
+            <a:off x="640080" y="1650492"/>
+            <a:ext cx="10911535" cy="731520"/>
+          </a:xfrm>
+          <a:prstGeom prst="rect">
+            <a:avLst/>
+          </a:prstGeom>
+          <a:noFill/>
+        </p:spPr>
+        <p:txBody>
+          <a:bodyPr wrap="square">
+            <a:spAutoFit/>
+          </a:bodyPr>
+          <a:lstStyle/>
+          <a:p>
+            <a:pPr algn="ctr"/>
+            <a:r>
+              <a:rPr sz="4800" b="1" i="0">
                 <a:solidFill>
                   <a:srgbClr val="FFFFFF"/>
                 </a:solidFill>
@@ -5131,8 +4851,8 @@
         </p:nvSpPr>
         <p:spPr>
           <a:xfrm>
-            <a:off x="594360" y="2560320"/>
-            <a:ext cx="11002975" cy="384048"/>
+            <a:off x="640080" y="2418588"/>
+            <a:ext cx="10911535" cy="365760"/>
           </a:xfrm>
           <a:prstGeom prst="rect">
             <a:avLst/>
@@ -5149,7 +4869,7 @@
             <a:r>
               <a:rPr sz="2400" b="0" i="1">
                 <a:solidFill>
-                  <a:srgbClr val="B4B4B4"/>
+                  <a:srgbClr val="AAAAAA"/>
                 </a:solidFill>
                 <a:latin typeface="Arial"/>
               </a:rPr>
@@ -5166,8 +4886,78 @@
         </p:nvSpPr>
         <p:spPr>
           <a:xfrm>
-            <a:off x="594360" y="2980944"/>
-            <a:ext cx="11002975" cy="347472"/>
+            <a:off x="640080" y="2985516"/>
+            <a:ext cx="10911535" cy="731520"/>
+          </a:xfrm>
+          <a:prstGeom prst="rect">
+            <a:avLst/>
+          </a:prstGeom>
+          <a:noFill/>
+        </p:spPr>
+        <p:txBody>
+          <a:bodyPr wrap="square">
+            <a:spAutoFit/>
+          </a:bodyPr>
+          <a:lstStyle/>
+          <a:p>
+            <a:pPr algn="ctr"/>
+            <a:r>
+              <a:rPr sz="4800" b="1" i="0">
+                <a:solidFill>
+                  <a:srgbClr val="FFFFFF"/>
+                </a:solidFill>
+                <a:latin typeface="Arial"/>
+              </a:rPr>
+              <a:t>あなたと　共に歩む</a:t>
+            </a:r>
+          </a:p>
+        </p:txBody>
+      </p:sp>
+      <p:sp>
+        <p:nvSpPr>
+          <p:cNvPr id="5" name="TextBox 4"/>
+          <p:cNvSpPr txBox="1"/>
+          <p:nvPr/>
+        </p:nvSpPr>
+        <p:spPr>
+          <a:xfrm>
+            <a:off x="640080" y="3753612"/>
+            <a:ext cx="10911535" cy="365760"/>
+          </a:xfrm>
+          <a:prstGeom prst="rect">
+            <a:avLst/>
+          </a:prstGeom>
+          <a:noFill/>
+        </p:spPr>
+        <p:txBody>
+          <a:bodyPr wrap="square">
+            <a:spAutoFit/>
+          </a:bodyPr>
+          <a:lstStyle/>
+          <a:p>
+            <a:pPr algn="ctr"/>
+            <a:r>
+              <a:rPr sz="2400" b="0" i="1">
+                <a:solidFill>
+                  <a:srgbClr val="AAAAAA"/>
+                </a:solidFill>
+                <a:latin typeface="Arial"/>
+              </a:rPr>
+              <a:t>anata to tomo ni ayumu</a:t>
+            </a:r>
+          </a:p>
+        </p:txBody>
+      </p:sp>
+      <p:sp>
+        <p:nvSpPr>
+          <p:cNvPr id="6" name="TextBox 5"/>
+          <p:cNvSpPr txBox="1"/>
+          <p:nvPr/>
+        </p:nvSpPr>
+        <p:spPr>
+          <a:xfrm>
+            <a:off x="640080" y="4530852"/>
+            <a:ext cx="10911535" cy="310896"/>
           </a:xfrm>
           <a:prstGeom prst="rect">
             <a:avLst/>
@@ -5184,81 +4974,11 @@
             <a:r>
               <a:rPr sz="2000" b="0" i="1">
                 <a:solidFill>
-                  <a:srgbClr val="8C8C8C"/>
-                </a:solidFill>
-                <a:latin typeface="Arial"/>
-              </a:rPr>
-              <a:t/>
-            </a:r>
-          </a:p>
-        </p:txBody>
-      </p:sp>
-      <p:sp>
-        <p:nvSpPr>
-          <p:cNvPr id="5" name="TextBox 4"/>
-          <p:cNvSpPr txBox="1"/>
-          <p:nvPr/>
-        </p:nvSpPr>
-        <p:spPr>
-          <a:xfrm>
-            <a:off x="594360" y="3529584"/>
-            <a:ext cx="11002975" cy="685800"/>
-          </a:xfrm>
-          <a:prstGeom prst="rect">
-            <a:avLst/>
-          </a:prstGeom>
-          <a:noFill/>
-        </p:spPr>
-        <p:txBody>
-          <a:bodyPr wrap="square">
-            <a:spAutoFit/>
-          </a:bodyPr>
-          <a:lstStyle/>
-          <a:p>
-            <a:pPr algn="ctr"/>
-            <a:r>
-              <a:rPr sz="4400" b="1" i="0">
-                <a:solidFill>
-                  <a:srgbClr val="FFFFFF"/>
-                </a:solidFill>
-                <a:latin typeface="Arial"/>
-              </a:rPr>
-              <a:t>あなたと　共に歩む</a:t>
-            </a:r>
-          </a:p>
-        </p:txBody>
-      </p:sp>
-      <p:sp>
-        <p:nvSpPr>
-          <p:cNvPr id="6" name="TextBox 5"/>
-          <p:cNvSpPr txBox="1"/>
-          <p:nvPr/>
-        </p:nvSpPr>
-        <p:spPr>
-          <a:xfrm>
-            <a:off x="594360" y="4251960"/>
-            <a:ext cx="11002975" cy="384048"/>
-          </a:xfrm>
-          <a:prstGeom prst="rect">
-            <a:avLst/>
-          </a:prstGeom>
-          <a:noFill/>
-        </p:spPr>
-        <p:txBody>
-          <a:bodyPr wrap="square">
-            <a:spAutoFit/>
-          </a:bodyPr>
-          <a:lstStyle/>
-          <a:p>
-            <a:pPr algn="ctr"/>
-            <a:r>
-              <a:rPr sz="2400" b="0" i="1">
-                <a:solidFill>
-                  <a:srgbClr val="B4B4B4"/>
-                </a:solidFill>
-                <a:latin typeface="Arial"/>
-              </a:rPr>
-              <a:t>anata to tomo ni ayumu</a:t>
+                  <a:srgbClr val="828282"/>
+                </a:solidFill>
+                <a:latin typeface="Arial"/>
+              </a:rPr>
+              <a:t>Para andar com Ele por toda a eternidade</a:t>
             </a:r>
           </a:p>
         </p:txBody>
@@ -5271,8 +4991,8 @@
         </p:nvSpPr>
         <p:spPr>
           <a:xfrm>
-            <a:off x="594360" y="4672584"/>
-            <a:ext cx="11002975" cy="347472"/>
+            <a:off x="640080" y="4896612"/>
+            <a:ext cx="10911535" cy="310896"/>
           </a:xfrm>
           <a:prstGeom prst="rect">
             <a:avLst/>
@@ -5289,11 +5009,11 @@
             <a:r>
               <a:rPr sz="2000" b="0" i="1">
                 <a:solidFill>
-                  <a:srgbClr val="8C8C8C"/>
-                </a:solidFill>
-                <a:latin typeface="Arial"/>
-              </a:rPr>
-              <a:t/>
+                  <a:srgbClr val="828282"/>
+                </a:solidFill>
+                <a:latin typeface="Arial"/>
+              </a:rPr>
+              <a:t>Oh, haverá um dia em que todos se prostrarão diante Dele</a:t>
             </a:r>
           </a:p>
         </p:txBody>
@@ -5332,23 +5052,23 @@
         </p:nvSpPr>
         <p:spPr>
           <a:xfrm>
-            <a:off x="594360" y="1837944"/>
-            <a:ext cx="11002975" cy="685800"/>
-          </a:xfrm>
-          <a:prstGeom prst="rect">
-            <a:avLst/>
-          </a:prstGeom>
-          <a:noFill/>
-        </p:spPr>
-        <p:txBody>
-          <a:bodyPr wrap="square">
-            <a:spAutoFit/>
-          </a:bodyPr>
-          <a:lstStyle/>
-          <a:p>
-            <a:pPr algn="ctr"/>
-            <a:r>
-              <a:rPr sz="4400" b="1" i="0">
+            <a:off x="640080" y="1650492"/>
+            <a:ext cx="10911535" cy="731520"/>
+          </a:xfrm>
+          <a:prstGeom prst="rect">
+            <a:avLst/>
+          </a:prstGeom>
+          <a:noFill/>
+        </p:spPr>
+        <p:txBody>
+          <a:bodyPr wrap="square">
+            <a:spAutoFit/>
+          </a:bodyPr>
+          <a:lstStyle/>
+          <a:p>
+            <a:pPr algn="ctr"/>
+            <a:r>
+              <a:rPr sz="4800" b="1" i="0">
                 <a:solidFill>
                   <a:srgbClr val="FFFFFF"/>
                 </a:solidFill>
@@ -5367,8 +5087,8 @@
         </p:nvSpPr>
         <p:spPr>
           <a:xfrm>
-            <a:off x="594360" y="2560320"/>
-            <a:ext cx="11002975" cy="384048"/>
+            <a:off x="640080" y="2418588"/>
+            <a:ext cx="10911535" cy="365760"/>
           </a:xfrm>
           <a:prstGeom prst="rect">
             <a:avLst/>
@@ -5385,7 +5105,7 @@
             <a:r>
               <a:rPr sz="2400" b="0" i="1">
                 <a:solidFill>
-                  <a:srgbClr val="B4B4B4"/>
+                  <a:srgbClr val="AAAAAA"/>
                 </a:solidFill>
                 <a:latin typeface="Arial"/>
               </a:rPr>
@@ -5402,8 +5122,78 @@
         </p:nvSpPr>
         <p:spPr>
           <a:xfrm>
-            <a:off x="594360" y="2980944"/>
-            <a:ext cx="11002975" cy="347472"/>
+            <a:off x="640080" y="2985516"/>
+            <a:ext cx="10911535" cy="731520"/>
+          </a:xfrm>
+          <a:prstGeom prst="rect">
+            <a:avLst/>
+          </a:prstGeom>
+          <a:noFill/>
+        </p:spPr>
+        <p:txBody>
+          <a:bodyPr wrap="square">
+            <a:spAutoFit/>
+          </a:bodyPr>
+          <a:lstStyle/>
+          <a:p>
+            <a:pPr algn="ctr"/>
+            <a:r>
+              <a:rPr sz="4800" b="1" i="0">
+                <a:solidFill>
+                  <a:srgbClr val="FFFFFF"/>
+                </a:solidFill>
+                <a:latin typeface="Arial"/>
+              </a:rPr>
+              <a:t>その日には死もなくなる</a:t>
+            </a:r>
+          </a:p>
+        </p:txBody>
+      </p:sp>
+      <p:sp>
+        <p:nvSpPr>
+          <p:cNvPr id="5" name="TextBox 4"/>
+          <p:cNvSpPr txBox="1"/>
+          <p:nvPr/>
+        </p:nvSpPr>
+        <p:spPr>
+          <a:xfrm>
+            <a:off x="640080" y="3753612"/>
+            <a:ext cx="10911535" cy="365760"/>
+          </a:xfrm>
+          <a:prstGeom prst="rect">
+            <a:avLst/>
+          </a:prstGeom>
+          <a:noFill/>
+        </p:spPr>
+        <p:txBody>
+          <a:bodyPr wrap="square">
+            <a:spAutoFit/>
+          </a:bodyPr>
+          <a:lstStyle/>
+          <a:p>
+            <a:pPr algn="ctr"/>
+            <a:r>
+              <a:rPr sz="2400" b="0" i="1">
+                <a:solidFill>
+                  <a:srgbClr val="AAAAAA"/>
+                </a:solidFill>
+                <a:latin typeface="Arial"/>
+              </a:rPr>
+              <a:t>Sonohiniwa shimo nakunaru</a:t>
+            </a:r>
+          </a:p>
+        </p:txBody>
+      </p:sp>
+      <p:sp>
+        <p:nvSpPr>
+          <p:cNvPr id="6" name="TextBox 5"/>
+          <p:cNvSpPr txBox="1"/>
+          <p:nvPr/>
+        </p:nvSpPr>
+        <p:spPr>
+          <a:xfrm>
+            <a:off x="640080" y="4530852"/>
+            <a:ext cx="10911535" cy="310896"/>
           </a:xfrm>
           <a:prstGeom prst="rect">
             <a:avLst/>
@@ -5420,81 +5210,11 @@
             <a:r>
               <a:rPr sz="2000" b="0" i="1">
                 <a:solidFill>
-                  <a:srgbClr val="8C8C8C"/>
-                </a:solidFill>
-                <a:latin typeface="Arial"/>
-              </a:rPr>
-              <a:t/>
-            </a:r>
-          </a:p>
-        </p:txBody>
-      </p:sp>
-      <p:sp>
-        <p:nvSpPr>
-          <p:cNvPr id="5" name="TextBox 4"/>
-          <p:cNvSpPr txBox="1"/>
-          <p:nvPr/>
-        </p:nvSpPr>
-        <p:spPr>
-          <a:xfrm>
-            <a:off x="594360" y="3529584"/>
-            <a:ext cx="11002975" cy="685800"/>
-          </a:xfrm>
-          <a:prstGeom prst="rect">
-            <a:avLst/>
-          </a:prstGeom>
-          <a:noFill/>
-        </p:spPr>
-        <p:txBody>
-          <a:bodyPr wrap="square">
-            <a:spAutoFit/>
-          </a:bodyPr>
-          <a:lstStyle/>
-          <a:p>
-            <a:pPr algn="ctr"/>
-            <a:r>
-              <a:rPr sz="4400" b="1" i="0">
-                <a:solidFill>
-                  <a:srgbClr val="FFFFFF"/>
-                </a:solidFill>
-                <a:latin typeface="Arial"/>
-              </a:rPr>
-              <a:t>その日には死もなくなる</a:t>
-            </a:r>
-          </a:p>
-        </p:txBody>
-      </p:sp>
-      <p:sp>
-        <p:nvSpPr>
-          <p:cNvPr id="6" name="TextBox 5"/>
-          <p:cNvSpPr txBox="1"/>
-          <p:nvPr/>
-        </p:nvSpPr>
-        <p:spPr>
-          <a:xfrm>
-            <a:off x="594360" y="4251960"/>
-            <a:ext cx="11002975" cy="384048"/>
-          </a:xfrm>
-          <a:prstGeom prst="rect">
-            <a:avLst/>
-          </a:prstGeom>
-          <a:noFill/>
-        </p:spPr>
-        <p:txBody>
-          <a:bodyPr wrap="square">
-            <a:spAutoFit/>
-          </a:bodyPr>
-          <a:lstStyle/>
-          <a:p>
-            <a:pPr algn="ctr"/>
-            <a:r>
-              <a:rPr sz="2400" b="0" i="1">
-                <a:solidFill>
-                  <a:srgbClr val="B4B4B4"/>
-                </a:solidFill>
-                <a:latin typeface="Arial"/>
-              </a:rPr>
-              <a:t>Sonohiniwa shimo nakunaru</a:t>
+                  <a:srgbClr val="828282"/>
+                </a:solidFill>
+                <a:latin typeface="Arial"/>
+              </a:rPr>
+              <a:t>Haverá um dia em que a morte não existirá mais</a:t>
             </a:r>
           </a:p>
         </p:txBody>
@@ -5507,8 +5227,8 @@
         </p:nvSpPr>
         <p:spPr>
           <a:xfrm>
-            <a:off x="594360" y="4672584"/>
-            <a:ext cx="11002975" cy="347472"/>
+            <a:off x="640080" y="4896612"/>
+            <a:ext cx="10911535" cy="310896"/>
           </a:xfrm>
           <a:prstGeom prst="rect">
             <a:avLst/>
@@ -5525,11 +5245,11 @@
             <a:r>
               <a:rPr sz="2000" b="0" i="1">
                 <a:solidFill>
-                  <a:srgbClr val="8C8C8C"/>
-                </a:solidFill>
-                <a:latin typeface="Arial"/>
-              </a:rPr>
-              <a:t/>
+                  <a:srgbClr val="828282"/>
+                </a:solidFill>
+                <a:latin typeface="Arial"/>
+              </a:rPr>
+              <a:t>Haverá um dia quando todo joelho se dobrará</a:t>
             </a:r>
           </a:p>
         </p:txBody>
@@ -5568,23 +5288,23 @@
         </p:nvSpPr>
         <p:spPr>
           <a:xfrm>
-            <a:off x="594360" y="1837944"/>
-            <a:ext cx="11002975" cy="685800"/>
-          </a:xfrm>
-          <a:prstGeom prst="rect">
-            <a:avLst/>
-          </a:prstGeom>
-          <a:noFill/>
-        </p:spPr>
-        <p:txBody>
-          <a:bodyPr wrap="square">
-            <a:spAutoFit/>
-          </a:bodyPr>
-          <a:lstStyle/>
-          <a:p>
-            <a:pPr algn="ctr"/>
-            <a:r>
-              <a:rPr sz="4400" b="1" i="0">
+            <a:off x="640080" y="1650492"/>
+            <a:ext cx="10911535" cy="731520"/>
+          </a:xfrm>
+          <a:prstGeom prst="rect">
+            <a:avLst/>
+          </a:prstGeom>
+          <a:noFill/>
+        </p:spPr>
+        <p:txBody>
+          <a:bodyPr wrap="square">
+            <a:spAutoFit/>
+          </a:bodyPr>
+          <a:lstStyle/>
+          <a:p>
+            <a:pPr algn="ctr"/>
+            <a:r>
+              <a:rPr sz="4800" b="1" i="0">
                 <a:solidFill>
                   <a:srgbClr val="FFFFFF"/>
                 </a:solidFill>
@@ -5603,8 +5323,8 @@
         </p:nvSpPr>
         <p:spPr>
           <a:xfrm>
-            <a:off x="594360" y="2560320"/>
-            <a:ext cx="11002975" cy="384048"/>
+            <a:off x="640080" y="2418588"/>
+            <a:ext cx="10911535" cy="365760"/>
           </a:xfrm>
           <a:prstGeom prst="rect">
             <a:avLst/>
@@ -5621,7 +5341,7 @@
             <a:r>
               <a:rPr sz="2400" b="0" i="1">
                 <a:solidFill>
-                  <a:srgbClr val="B4B4B4"/>
+                  <a:srgbClr val="AAAAAA"/>
                 </a:solidFill>
                 <a:latin typeface="Arial"/>
               </a:rPr>
@@ -5638,8 +5358,78 @@
         </p:nvSpPr>
         <p:spPr>
           <a:xfrm>
-            <a:off x="594360" y="2980944"/>
-            <a:ext cx="11002975" cy="347472"/>
+            <a:off x="640080" y="2985516"/>
+            <a:ext cx="10911535" cy="731520"/>
+          </a:xfrm>
+          <a:prstGeom prst="rect">
+            <a:avLst/>
+          </a:prstGeom>
+          <a:noFill/>
+        </p:spPr>
+        <p:txBody>
+          <a:bodyPr wrap="square">
+            <a:spAutoFit/>
+          </a:bodyPr>
+          <a:lstStyle/>
+          <a:p>
+            <a:pPr algn="ctr"/>
+            <a:r>
+              <a:rPr sz="4800" b="1" i="0">
+                <a:solidFill>
+                  <a:srgbClr val="FFFFFF"/>
+                </a:solidFill>
+                <a:latin typeface="Arial"/>
+              </a:rPr>
+              <a:t>聖なる　主よ</a:t>
+            </a:r>
+          </a:p>
+        </p:txBody>
+      </p:sp>
+      <p:sp>
+        <p:nvSpPr>
+          <p:cNvPr id="5" name="TextBox 4"/>
+          <p:cNvSpPr txBox="1"/>
+          <p:nvPr/>
+        </p:nvSpPr>
+        <p:spPr>
+          <a:xfrm>
+            <a:off x="640080" y="3753612"/>
+            <a:ext cx="10911535" cy="365760"/>
+          </a:xfrm>
+          <a:prstGeom prst="rect">
+            <a:avLst/>
+          </a:prstGeom>
+          <a:noFill/>
+        </p:spPr>
+        <p:txBody>
+          <a:bodyPr wrap="square">
+            <a:spAutoFit/>
+          </a:bodyPr>
+          <a:lstStyle/>
+          <a:p>
+            <a:pPr algn="ctr"/>
+            <a:r>
+              <a:rPr sz="2400" b="0" i="1">
+                <a:solidFill>
+                  <a:srgbClr val="AAAAAA"/>
+                </a:solidFill>
+                <a:latin typeface="Arial"/>
+              </a:rPr>
+              <a:t>Seinaru shuyo</a:t>
+            </a:r>
+          </a:p>
+        </p:txBody>
+      </p:sp>
+      <p:sp>
+        <p:nvSpPr>
+          <p:cNvPr id="6" name="TextBox 5"/>
+          <p:cNvSpPr txBox="1"/>
+          <p:nvPr/>
+        </p:nvSpPr>
+        <p:spPr>
+          <a:xfrm>
+            <a:off x="640080" y="4530852"/>
+            <a:ext cx="10911535" cy="310896"/>
           </a:xfrm>
           <a:prstGeom prst="rect">
             <a:avLst/>
@@ -5656,81 +5446,11 @@
             <a:r>
               <a:rPr sz="2000" b="0" i="1">
                 <a:solidFill>
-                  <a:srgbClr val="8C8C8C"/>
-                </a:solidFill>
-                <a:latin typeface="Arial"/>
-              </a:rPr>
-              <a:t/>
-            </a:r>
-          </a:p>
-        </p:txBody>
-      </p:sp>
-      <p:sp>
-        <p:nvSpPr>
-          <p:cNvPr id="5" name="TextBox 4"/>
-          <p:cNvSpPr txBox="1"/>
-          <p:nvPr/>
-        </p:nvSpPr>
-        <p:spPr>
-          <a:xfrm>
-            <a:off x="594360" y="3529584"/>
-            <a:ext cx="11002975" cy="685800"/>
-          </a:xfrm>
-          <a:prstGeom prst="rect">
-            <a:avLst/>
-          </a:prstGeom>
-          <a:noFill/>
-        </p:spPr>
-        <p:txBody>
-          <a:bodyPr wrap="square">
-            <a:spAutoFit/>
-          </a:bodyPr>
-          <a:lstStyle/>
-          <a:p>
-            <a:pPr algn="ctr"/>
-            <a:r>
-              <a:rPr sz="4400" b="1" i="0">
-                <a:solidFill>
-                  <a:srgbClr val="FFFFFF"/>
-                </a:solidFill>
-                <a:latin typeface="Arial"/>
-              </a:rPr>
-              <a:t>聖なる　主よ</a:t>
-            </a:r>
-          </a:p>
-        </p:txBody>
-      </p:sp>
-      <p:sp>
-        <p:nvSpPr>
-          <p:cNvPr id="6" name="TextBox 5"/>
-          <p:cNvSpPr txBox="1"/>
-          <p:nvPr/>
-        </p:nvSpPr>
-        <p:spPr>
-          <a:xfrm>
-            <a:off x="594360" y="4251960"/>
-            <a:ext cx="11002975" cy="384048"/>
-          </a:xfrm>
-          <a:prstGeom prst="rect">
-            <a:avLst/>
-          </a:prstGeom>
-          <a:noFill/>
-        </p:spPr>
-        <p:txBody>
-          <a:bodyPr wrap="square">
-            <a:spAutoFit/>
-          </a:bodyPr>
-          <a:lstStyle/>
-          <a:p>
-            <a:pPr algn="ctr"/>
-            <a:r>
-              <a:rPr sz="2400" b="0" i="1">
-                <a:solidFill>
-                  <a:srgbClr val="B4B4B4"/>
-                </a:solidFill>
-                <a:latin typeface="Arial"/>
-              </a:rPr>
-              <a:t>Seinaru shuyo</a:t>
+                  <a:srgbClr val="828282"/>
+                </a:solidFill>
+                <a:latin typeface="Arial"/>
+              </a:rPr>
+              <a:t>E todo ser criado cantará</a:t>
             </a:r>
           </a:p>
         </p:txBody>
@@ -5743,8 +5463,8 @@
         </p:nvSpPr>
         <p:spPr>
           <a:xfrm>
-            <a:off x="594360" y="4672584"/>
-            <a:ext cx="11002975" cy="347472"/>
+            <a:off x="640080" y="4896612"/>
+            <a:ext cx="10911535" cy="310896"/>
           </a:xfrm>
           <a:prstGeom prst="rect">
             <a:avLst/>
@@ -5761,11 +5481,11 @@
             <a:r>
               <a:rPr sz="2000" b="0" i="1">
                 <a:solidFill>
-                  <a:srgbClr val="8C8C8C"/>
-                </a:solidFill>
-                <a:latin typeface="Arial"/>
-              </a:rPr>
-              <a:t/>
+                  <a:srgbClr val="828282"/>
+                </a:solidFill>
+                <a:latin typeface="Arial"/>
+              </a:rPr>
+              <a:t>Santo, santo, santo é o Senhor</a:t>
             </a:r>
           </a:p>
         </p:txBody>
@@ -5804,23 +5524,23 @@
         </p:nvSpPr>
         <p:spPr>
           <a:xfrm>
-            <a:off x="594360" y="2258568"/>
-            <a:ext cx="11002975" cy="685800"/>
-          </a:xfrm>
-          <a:prstGeom prst="rect">
-            <a:avLst/>
-          </a:prstGeom>
-          <a:noFill/>
-        </p:spPr>
-        <p:txBody>
-          <a:bodyPr wrap="square">
-            <a:spAutoFit/>
-          </a:bodyPr>
-          <a:lstStyle/>
-          <a:p>
-            <a:pPr algn="ctr"/>
-            <a:r>
-              <a:rPr sz="2933" b="1" i="0">
+            <a:off x="640080" y="2052828"/>
+            <a:ext cx="10911535" cy="731520"/>
+          </a:xfrm>
+          <a:prstGeom prst="rect">
+            <a:avLst/>
+          </a:prstGeom>
+          <a:noFill/>
+        </p:spPr>
+        <p:txBody>
+          <a:bodyPr wrap="square">
+            <a:spAutoFit/>
+          </a:bodyPr>
+          <a:lstStyle/>
+          <a:p>
+            <a:pPr algn="ctr"/>
+            <a:r>
+              <a:rPr sz="3200" b="1" i="0">
                 <a:solidFill>
                   <a:srgbClr val="FFFFFF"/>
                 </a:solidFill>
@@ -5839,99 +5559,29 @@
         </p:nvSpPr>
         <p:spPr>
           <a:xfrm>
-            <a:off x="594360" y="2980944"/>
-            <a:ext cx="11002975" cy="347472"/>
-          </a:xfrm>
-          <a:prstGeom prst="rect">
-            <a:avLst/>
-          </a:prstGeom>
-          <a:noFill/>
-        </p:spPr>
-        <p:txBody>
-          <a:bodyPr wrap="square">
-            <a:spAutoFit/>
-          </a:bodyPr>
-          <a:lstStyle/>
-          <a:p>
-            <a:pPr algn="ctr"/>
-            <a:r>
-              <a:rPr sz="2200" b="0" i="1">
-                <a:solidFill>
-                  <a:srgbClr val="8C8C8C"/>
-                </a:solidFill>
-                <a:latin typeface="Arial"/>
-              </a:rPr>
-              <a:t/>
-            </a:r>
-          </a:p>
-        </p:txBody>
-      </p:sp>
-      <p:sp>
-        <p:nvSpPr>
-          <p:cNvPr id="4" name="TextBox 3"/>
-          <p:cNvSpPr txBox="1"/>
-          <p:nvPr/>
-        </p:nvSpPr>
-        <p:spPr>
-          <a:xfrm>
-            <a:off x="594360" y="3529584"/>
-            <a:ext cx="11002975" cy="685800"/>
-          </a:xfrm>
-          <a:prstGeom prst="rect">
-            <a:avLst/>
-          </a:prstGeom>
-          <a:noFill/>
-        </p:spPr>
-        <p:txBody>
-          <a:bodyPr wrap="square">
-            <a:spAutoFit/>
-          </a:bodyPr>
-          <a:lstStyle/>
-          <a:p>
-            <a:pPr algn="ctr"/>
-            <a:r>
-              <a:rPr sz="2873" b="1" i="0">
+            <a:off x="640080" y="2985516"/>
+            <a:ext cx="10911535" cy="731520"/>
+          </a:xfrm>
+          <a:prstGeom prst="rect">
+            <a:avLst/>
+          </a:prstGeom>
+          <a:noFill/>
+        </p:spPr>
+        <p:txBody>
+          <a:bodyPr wrap="square">
+            <a:spAutoFit/>
+          </a:bodyPr>
+          <a:lstStyle/>
+          <a:p>
+            <a:pPr algn="ctr"/>
+            <a:r>
+              <a:rPr sz="3100" b="1" i="0">
                 <a:solidFill>
                   <a:srgbClr val="FFFFFF"/>
                 </a:solidFill>
                 <a:latin typeface="Arial"/>
               </a:rPr>
               <a:t>Para olhar para Aquele que sangrou para me salvar</a:t>
-            </a:r>
-          </a:p>
-        </p:txBody>
-      </p:sp>
-      <p:sp>
-        <p:nvSpPr>
-          <p:cNvPr id="5" name="TextBox 4"/>
-          <p:cNvSpPr txBox="1"/>
-          <p:nvPr/>
-        </p:nvSpPr>
-        <p:spPr>
-          <a:xfrm>
-            <a:off x="594360" y="4251960"/>
-            <a:ext cx="11002975" cy="347472"/>
-          </a:xfrm>
-          <a:prstGeom prst="rect">
-            <a:avLst/>
-          </a:prstGeom>
-          <a:noFill/>
-        </p:spPr>
-        <p:txBody>
-          <a:bodyPr wrap="square">
-            <a:spAutoFit/>
-          </a:bodyPr>
-          <a:lstStyle/>
-          <a:p>
-            <a:pPr algn="ctr"/>
-            <a:r>
-              <a:rPr sz="2200" b="0" i="1">
-                <a:solidFill>
-                  <a:srgbClr val="8C8C8C"/>
-                </a:solidFill>
-                <a:latin typeface="Arial"/>
-              </a:rPr>
-              <a:t/>
             </a:r>
           </a:p>
         </p:txBody>
@@ -5970,23 +5620,23 @@
         </p:nvSpPr>
         <p:spPr>
           <a:xfrm>
-            <a:off x="594360" y="2258568"/>
-            <a:ext cx="11002975" cy="685800"/>
-          </a:xfrm>
-          <a:prstGeom prst="rect">
-            <a:avLst/>
-          </a:prstGeom>
-          <a:noFill/>
-        </p:spPr>
-        <p:txBody>
-          <a:bodyPr wrap="square">
-            <a:spAutoFit/>
-          </a:bodyPr>
-          <a:lstStyle/>
-          <a:p>
-            <a:pPr algn="ctr"/>
-            <a:r>
-              <a:rPr sz="3520" b="1" i="0">
+            <a:off x="640080" y="2052828"/>
+            <a:ext cx="10911535" cy="731520"/>
+          </a:xfrm>
+          <a:prstGeom prst="rect">
+            <a:avLst/>
+          </a:prstGeom>
+          <a:noFill/>
+        </p:spPr>
+        <p:txBody>
+          <a:bodyPr wrap="square">
+            <a:spAutoFit/>
+          </a:bodyPr>
+          <a:lstStyle/>
+          <a:p>
+            <a:pPr algn="ctr"/>
+            <a:r>
+              <a:rPr sz="3800" b="1" i="0">
                 <a:solidFill>
                   <a:srgbClr val="FFFFFF"/>
                 </a:solidFill>
@@ -6005,99 +5655,29 @@
         </p:nvSpPr>
         <p:spPr>
           <a:xfrm>
-            <a:off x="594360" y="2980944"/>
-            <a:ext cx="11002975" cy="347472"/>
-          </a:xfrm>
-          <a:prstGeom prst="rect">
-            <a:avLst/>
-          </a:prstGeom>
-          <a:noFill/>
-        </p:spPr>
-        <p:txBody>
-          <a:bodyPr wrap="square">
-            <a:spAutoFit/>
-          </a:bodyPr>
-          <a:lstStyle/>
-          <a:p>
-            <a:pPr algn="ctr"/>
-            <a:r>
-              <a:rPr sz="2200" b="0" i="1">
-                <a:solidFill>
-                  <a:srgbClr val="8C8C8C"/>
-                </a:solidFill>
-                <a:latin typeface="Arial"/>
-              </a:rPr>
-              <a:t/>
-            </a:r>
-          </a:p>
-        </p:txBody>
-      </p:sp>
-      <p:sp>
-        <p:nvSpPr>
-          <p:cNvPr id="4" name="TextBox 3"/>
-          <p:cNvSpPr txBox="1"/>
-          <p:nvPr/>
-        </p:nvSpPr>
-        <p:spPr>
-          <a:xfrm>
-            <a:off x="594360" y="3529584"/>
-            <a:ext cx="11002975" cy="685800"/>
-          </a:xfrm>
-          <a:prstGeom prst="rect">
-            <a:avLst/>
-          </a:prstGeom>
-          <a:noFill/>
-        </p:spPr>
-        <p:txBody>
-          <a:bodyPr wrap="square">
-            <a:spAutoFit/>
-          </a:bodyPr>
-          <a:lstStyle/>
-          <a:p>
-            <a:pPr algn="ctr"/>
-            <a:r>
-              <a:rPr sz="2514" b="1" i="0">
+            <a:off x="640080" y="2985516"/>
+            <a:ext cx="10911535" cy="731520"/>
+          </a:xfrm>
+          <a:prstGeom prst="rect">
+            <a:avLst/>
+          </a:prstGeom>
+          <a:noFill/>
+        </p:spPr>
+        <p:txBody>
+          <a:bodyPr wrap="square">
+            <a:spAutoFit/>
+          </a:bodyPr>
+          <a:lstStyle/>
+          <a:p>
+            <a:pPr algn="ctr"/>
+            <a:r>
+              <a:rPr sz="2700" b="1" i="0">
                 <a:solidFill>
                   <a:srgbClr val="FFFFFF"/>
                 </a:solidFill>
                 <a:latin typeface="Arial"/>
               </a:rPr>
               <a:t>Oh, haverá um dia em que todos se prostrarão diante Dele</a:t>
-            </a:r>
-          </a:p>
-        </p:txBody>
-      </p:sp>
-      <p:sp>
-        <p:nvSpPr>
-          <p:cNvPr id="5" name="TextBox 4"/>
-          <p:cNvSpPr txBox="1"/>
-          <p:nvPr/>
-        </p:nvSpPr>
-        <p:spPr>
-          <a:xfrm>
-            <a:off x="594360" y="4251960"/>
-            <a:ext cx="11002975" cy="347472"/>
-          </a:xfrm>
-          <a:prstGeom prst="rect">
-            <a:avLst/>
-          </a:prstGeom>
-          <a:noFill/>
-        </p:spPr>
-        <p:txBody>
-          <a:bodyPr wrap="square">
-            <a:spAutoFit/>
-          </a:bodyPr>
-          <a:lstStyle/>
-          <a:p>
-            <a:pPr algn="ctr"/>
-            <a:r>
-              <a:rPr sz="2200" b="0" i="1">
-                <a:solidFill>
-                  <a:srgbClr val="8C8C8C"/>
-                </a:solidFill>
-                <a:latin typeface="Arial"/>
-              </a:rPr>
-              <a:t/>
             </a:r>
           </a:p>
         </p:txBody>
@@ -6136,23 +5716,23 @@
         </p:nvSpPr>
         <p:spPr>
           <a:xfrm>
-            <a:off x="594360" y="2258568"/>
-            <a:ext cx="11002975" cy="685800"/>
-          </a:xfrm>
-          <a:prstGeom prst="rect">
-            <a:avLst/>
-          </a:prstGeom>
-          <a:noFill/>
-        </p:spPr>
-        <p:txBody>
-          <a:bodyPr wrap="square">
-            <a:spAutoFit/>
-          </a:bodyPr>
-          <a:lstStyle/>
-          <a:p>
-            <a:pPr algn="ctr"/>
-            <a:r>
-              <a:rPr sz="3060" b="1" i="0">
+            <a:off x="640080" y="2052828"/>
+            <a:ext cx="10911535" cy="731520"/>
+          </a:xfrm>
+          <a:prstGeom prst="rect">
+            <a:avLst/>
+          </a:prstGeom>
+          <a:noFill/>
+        </p:spPr>
+        <p:txBody>
+          <a:bodyPr wrap="square">
+            <a:spAutoFit/>
+          </a:bodyPr>
+          <a:lstStyle/>
+          <a:p>
+            <a:pPr algn="ctr"/>
+            <a:r>
+              <a:rPr sz="3300" b="1" i="0">
                 <a:solidFill>
                   <a:srgbClr val="FFFFFF"/>
                 </a:solidFill>
@@ -6171,99 +5751,29 @@
         </p:nvSpPr>
         <p:spPr>
           <a:xfrm>
-            <a:off x="594360" y="2980944"/>
-            <a:ext cx="11002975" cy="347472"/>
-          </a:xfrm>
-          <a:prstGeom prst="rect">
-            <a:avLst/>
-          </a:prstGeom>
-          <a:noFill/>
-        </p:spPr>
-        <p:txBody>
-          <a:bodyPr wrap="square">
-            <a:spAutoFit/>
-          </a:bodyPr>
-          <a:lstStyle/>
-          <a:p>
-            <a:pPr algn="ctr"/>
-            <a:r>
-              <a:rPr sz="2200" b="0" i="1">
-                <a:solidFill>
-                  <a:srgbClr val="8C8C8C"/>
-                </a:solidFill>
-                <a:latin typeface="Arial"/>
-              </a:rPr>
-              <a:t/>
-            </a:r>
-          </a:p>
-        </p:txBody>
-      </p:sp>
-      <p:sp>
-        <p:nvSpPr>
-          <p:cNvPr id="4" name="TextBox 3"/>
-          <p:cNvSpPr txBox="1"/>
-          <p:nvPr/>
-        </p:nvSpPr>
-        <p:spPr>
-          <a:xfrm>
-            <a:off x="594360" y="3529584"/>
-            <a:ext cx="11002975" cy="685800"/>
-          </a:xfrm>
-          <a:prstGeom prst="rect">
-            <a:avLst/>
-          </a:prstGeom>
-          <a:noFill/>
-        </p:spPr>
-        <p:txBody>
-          <a:bodyPr wrap="square">
-            <a:spAutoFit/>
-          </a:bodyPr>
-          <a:lstStyle/>
-          <a:p>
-            <a:pPr algn="ctr"/>
-            <a:r>
-              <a:rPr sz="3274" b="1" i="0">
+            <a:off x="640080" y="2985516"/>
+            <a:ext cx="10911535" cy="731520"/>
+          </a:xfrm>
+          <a:prstGeom prst="rect">
+            <a:avLst/>
+          </a:prstGeom>
+          <a:noFill/>
+        </p:spPr>
+        <p:txBody>
+          <a:bodyPr wrap="square">
+            <a:spAutoFit/>
+          </a:bodyPr>
+          <a:lstStyle/>
+          <a:p>
+            <a:pPr algn="ctr"/>
+            <a:r>
+              <a:rPr sz="3500" b="1" i="0">
                 <a:solidFill>
                   <a:srgbClr val="FFFFFF"/>
                 </a:solidFill>
                 <a:latin typeface="Arial"/>
               </a:rPr>
               <a:t>Haverá um dia quando todo joelho se dobrará</a:t>
-            </a:r>
-          </a:p>
-        </p:txBody>
-      </p:sp>
-      <p:sp>
-        <p:nvSpPr>
-          <p:cNvPr id="5" name="TextBox 4"/>
-          <p:cNvSpPr txBox="1"/>
-          <p:nvPr/>
-        </p:nvSpPr>
-        <p:spPr>
-          <a:xfrm>
-            <a:off x="594360" y="4251960"/>
-            <a:ext cx="11002975" cy="347472"/>
-          </a:xfrm>
-          <a:prstGeom prst="rect">
-            <a:avLst/>
-          </a:prstGeom>
-          <a:noFill/>
-        </p:spPr>
-        <p:txBody>
-          <a:bodyPr wrap="square">
-            <a:spAutoFit/>
-          </a:bodyPr>
-          <a:lstStyle/>
-          <a:p>
-            <a:pPr algn="ctr"/>
-            <a:r>
-              <a:rPr sz="2200" b="0" i="1">
-                <a:solidFill>
-                  <a:srgbClr val="8C8C8C"/>
-                </a:solidFill>
-                <a:latin typeface="Arial"/>
-              </a:rPr>
-              <a:t/>
             </a:r>
           </a:p>
         </p:txBody>
@@ -6302,23 +5812,23 @@
         </p:nvSpPr>
         <p:spPr>
           <a:xfrm>
-            <a:off x="594360" y="2258568"/>
-            <a:ext cx="11002975" cy="685800"/>
-          </a:xfrm>
-          <a:prstGeom prst="rect">
-            <a:avLst/>
-          </a:prstGeom>
-          <a:noFill/>
-        </p:spPr>
-        <p:txBody>
-          <a:bodyPr wrap="square">
-            <a:spAutoFit/>
-          </a:bodyPr>
-          <a:lstStyle/>
-          <a:p>
-            <a:pPr algn="ctr"/>
-            <a:r>
-              <a:rPr sz="4400" b="1" i="0">
+            <a:off x="640080" y="2052828"/>
+            <a:ext cx="10911535" cy="731520"/>
+          </a:xfrm>
+          <a:prstGeom prst="rect">
+            <a:avLst/>
+          </a:prstGeom>
+          <a:noFill/>
+        </p:spPr>
+        <p:txBody>
+          <a:bodyPr wrap="square">
+            <a:spAutoFit/>
+          </a:bodyPr>
+          <a:lstStyle/>
+          <a:p>
+            <a:pPr algn="ctr"/>
+            <a:r>
+              <a:rPr sz="4800" b="1" i="0">
                 <a:solidFill>
                   <a:srgbClr val="FFFFFF"/>
                 </a:solidFill>
@@ -6337,99 +5847,29 @@
         </p:nvSpPr>
         <p:spPr>
           <a:xfrm>
-            <a:off x="594360" y="2980944"/>
-            <a:ext cx="11002975" cy="347472"/>
-          </a:xfrm>
-          <a:prstGeom prst="rect">
-            <a:avLst/>
-          </a:prstGeom>
-          <a:noFill/>
-        </p:spPr>
-        <p:txBody>
-          <a:bodyPr wrap="square">
-            <a:spAutoFit/>
-          </a:bodyPr>
-          <a:lstStyle/>
-          <a:p>
-            <a:pPr algn="ctr"/>
-            <a:r>
-              <a:rPr sz="2200" b="0" i="1">
-                <a:solidFill>
-                  <a:srgbClr val="8C8C8C"/>
-                </a:solidFill>
-                <a:latin typeface="Arial"/>
-              </a:rPr>
-              <a:t/>
-            </a:r>
-          </a:p>
-        </p:txBody>
-      </p:sp>
-      <p:sp>
-        <p:nvSpPr>
-          <p:cNvPr id="4" name="TextBox 3"/>
-          <p:cNvSpPr txBox="1"/>
-          <p:nvPr/>
-        </p:nvSpPr>
-        <p:spPr>
-          <a:xfrm>
-            <a:off x="594360" y="3529584"/>
-            <a:ext cx="11002975" cy="685800"/>
-          </a:xfrm>
-          <a:prstGeom prst="rect">
-            <a:avLst/>
-          </a:prstGeom>
-          <a:noFill/>
-        </p:spPr>
-        <p:txBody>
-          <a:bodyPr wrap="square">
-            <a:spAutoFit/>
-          </a:bodyPr>
-          <a:lstStyle/>
-          <a:p>
-            <a:pPr algn="ctr"/>
-            <a:r>
-              <a:rPr sz="4400" b="1" i="0">
+            <a:off x="640080" y="2985516"/>
+            <a:ext cx="10911535" cy="731520"/>
+          </a:xfrm>
+          <a:prstGeom prst="rect">
+            <a:avLst/>
+          </a:prstGeom>
+          <a:noFill/>
+        </p:spPr>
+        <p:txBody>
+          <a:bodyPr wrap="square">
+            <a:spAutoFit/>
+          </a:bodyPr>
+          <a:lstStyle/>
+          <a:p>
+            <a:pPr algn="ctr"/>
+            <a:r>
+              <a:rPr sz="4800" b="1" i="0">
                 <a:solidFill>
                   <a:srgbClr val="FFFFFF"/>
                 </a:solidFill>
                 <a:latin typeface="Arial"/>
               </a:rPr>
               <a:t>Santo, santo, santo é o Senhor</a:t>
-            </a:r>
-          </a:p>
-        </p:txBody>
-      </p:sp>
-      <p:sp>
-        <p:nvSpPr>
-          <p:cNvPr id="5" name="TextBox 4"/>
-          <p:cNvSpPr txBox="1"/>
-          <p:nvPr/>
-        </p:nvSpPr>
-        <p:spPr>
-          <a:xfrm>
-            <a:off x="594360" y="4251960"/>
-            <a:ext cx="11002975" cy="347472"/>
-          </a:xfrm>
-          <a:prstGeom prst="rect">
-            <a:avLst/>
-          </a:prstGeom>
-          <a:noFill/>
-        </p:spPr>
-        <p:txBody>
-          <a:bodyPr wrap="square">
-            <a:spAutoFit/>
-          </a:bodyPr>
-          <a:lstStyle/>
-          <a:p>
-            <a:pPr algn="ctr"/>
-            <a:r>
-              <a:rPr sz="2200" b="0" i="1">
-                <a:solidFill>
-                  <a:srgbClr val="8C8C8C"/>
-                </a:solidFill>
-                <a:latin typeface="Arial"/>
-              </a:rPr>
-              <a:t/>
             </a:r>
           </a:p>
         </p:txBody>
@@ -6468,23 +5908,23 @@
         </p:nvSpPr>
         <p:spPr>
           <a:xfrm>
-            <a:off x="594360" y="2258568"/>
-            <a:ext cx="11002975" cy="685800"/>
-          </a:xfrm>
-          <a:prstGeom prst="rect">
-            <a:avLst/>
-          </a:prstGeom>
-          <a:noFill/>
-        </p:spPr>
-        <p:txBody>
-          <a:bodyPr wrap="square">
-            <a:spAutoFit/>
-          </a:bodyPr>
-          <a:lstStyle/>
-          <a:p>
-            <a:pPr algn="ctr"/>
-            <a:r>
-              <a:rPr sz="4400" b="1" i="0">
+            <a:off x="640080" y="2052828"/>
+            <a:ext cx="10911535" cy="731520"/>
+          </a:xfrm>
+          <a:prstGeom prst="rect">
+            <a:avLst/>
+          </a:prstGeom>
+          <a:noFill/>
+        </p:spPr>
+        <p:txBody>
+          <a:bodyPr wrap="square">
+            <a:spAutoFit/>
+          </a:bodyPr>
+          <a:lstStyle/>
+          <a:p>
+            <a:pPr algn="ctr"/>
+            <a:r>
+              <a:rPr sz="4800" b="1" i="0">
                 <a:solidFill>
                   <a:srgbClr val="FFFFFF"/>
                 </a:solidFill>
@@ -6503,99 +5943,29 @@
         </p:nvSpPr>
         <p:spPr>
           <a:xfrm>
-            <a:off x="594360" y="2980944"/>
-            <a:ext cx="11002975" cy="347472"/>
-          </a:xfrm>
-          <a:prstGeom prst="rect">
-            <a:avLst/>
-          </a:prstGeom>
-          <a:noFill/>
-        </p:spPr>
-        <p:txBody>
-          <a:bodyPr wrap="square">
-            <a:spAutoFit/>
-          </a:bodyPr>
-          <a:lstStyle/>
-          <a:p>
-            <a:pPr algn="ctr"/>
-            <a:r>
-              <a:rPr sz="2200" b="0" i="1">
-                <a:solidFill>
-                  <a:srgbClr val="8C8C8C"/>
-                </a:solidFill>
-                <a:latin typeface="Arial"/>
-              </a:rPr>
-              <a:t/>
-            </a:r>
-          </a:p>
-        </p:txBody>
-      </p:sp>
-      <p:sp>
-        <p:nvSpPr>
-          <p:cNvPr id="4" name="TextBox 3"/>
-          <p:cNvSpPr txBox="1"/>
-          <p:nvPr/>
-        </p:nvSpPr>
-        <p:spPr>
-          <a:xfrm>
-            <a:off x="594360" y="3529584"/>
-            <a:ext cx="11002975" cy="685800"/>
-          </a:xfrm>
-          <a:prstGeom prst="rect">
-            <a:avLst/>
-          </a:prstGeom>
-          <a:noFill/>
-        </p:spPr>
-        <p:txBody>
-          <a:bodyPr wrap="square">
-            <a:spAutoFit/>
-          </a:bodyPr>
-          <a:lstStyle/>
-          <a:p>
-            <a:pPr algn="ctr"/>
-            <a:r>
-              <a:rPr sz="4400" b="1" i="0">
+            <a:off x="640080" y="2985516"/>
+            <a:ext cx="10911535" cy="731520"/>
+          </a:xfrm>
+          <a:prstGeom prst="rect">
+            <a:avLst/>
+          </a:prstGeom>
+          <a:noFill/>
+        </p:spPr>
+        <p:txBody>
+          <a:bodyPr wrap="square">
+            <a:spAutoFit/>
+          </a:bodyPr>
+          <a:lstStyle/>
+          <a:p>
+            <a:pPr algn="ctr"/>
+            <a:r>
+              <a:rPr sz="4800" b="1" i="0">
                 <a:solidFill>
                   <a:srgbClr val="FFFFFF"/>
                 </a:solidFill>
                 <a:latin typeface="Arial"/>
               </a:rPr>
               <a:t>Santo, santo, santo é o Senhor</a:t>
-            </a:r>
-          </a:p>
-        </p:txBody>
-      </p:sp>
-      <p:sp>
-        <p:nvSpPr>
-          <p:cNvPr id="5" name="TextBox 4"/>
-          <p:cNvSpPr txBox="1"/>
-          <p:nvPr/>
-        </p:nvSpPr>
-        <p:spPr>
-          <a:xfrm>
-            <a:off x="594360" y="4251960"/>
-            <a:ext cx="11002975" cy="347472"/>
-          </a:xfrm>
-          <a:prstGeom prst="rect">
-            <a:avLst/>
-          </a:prstGeom>
-          <a:noFill/>
-        </p:spPr>
-        <p:txBody>
-          <a:bodyPr wrap="square">
-            <a:spAutoFit/>
-          </a:bodyPr>
-          <a:lstStyle/>
-          <a:p>
-            <a:pPr algn="ctr"/>
-            <a:r>
-              <a:rPr sz="2200" b="0" i="1">
-                <a:solidFill>
-                  <a:srgbClr val="8C8C8C"/>
-                </a:solidFill>
-                <a:latin typeface="Arial"/>
-              </a:rPr>
-              <a:t/>
             </a:r>
           </a:p>
         </p:txBody>

--- a/output_pptx/Hymn_Of_Heaven.pptx
+++ b/output_pptx/Hymn_Of_Heaven.pptx
@@ -3384,6 +3384,41 @@
           </a:p>
         </p:txBody>
       </p:sp>
+      <p:sp>
+        <p:nvSpPr>
+          <p:cNvPr id="3" name="TextBox 2"/>
+          <p:cNvSpPr txBox="1"/>
+          <p:nvPr/>
+        </p:nvSpPr>
+        <p:spPr>
+          <a:xfrm>
+            <a:off x="640080" y="3845052"/>
+            <a:ext cx="10911535" cy="310896"/>
+          </a:xfrm>
+          <a:prstGeom prst="rect">
+            <a:avLst/>
+          </a:prstGeom>
+          <a:noFill/>
+        </p:spPr>
+        <p:txBody>
+          <a:bodyPr wrap="square">
+            <a:spAutoFit/>
+          </a:bodyPr>
+          <a:lstStyle/>
+          <a:p>
+            <a:pPr algn="ctr"/>
+            <a:r>
+              <a:rPr sz="2000" b="0" i="0">
+                <a:solidFill>
+                  <a:srgbClr val="828282"/>
+                </a:solidFill>
+                <a:latin typeface="Arial"/>
+              </a:rPr>
+              <a:t>とこしえまでとこしえまで</a:t>
+            </a:r>
+          </a:p>
+        </p:txBody>
+      </p:sp>
     </p:spTree>
   </p:cSld>
   <p:clrMapOvr>
@@ -3480,6 +3515,76 @@
           </a:p>
         </p:txBody>
       </p:sp>
+      <p:sp>
+        <p:nvSpPr>
+          <p:cNvPr id="4" name="TextBox 3"/>
+          <p:cNvSpPr txBox="1"/>
+          <p:nvPr/>
+        </p:nvSpPr>
+        <p:spPr>
+          <a:xfrm>
+            <a:off x="640080" y="4128516"/>
+            <a:ext cx="10911535" cy="310896"/>
+          </a:xfrm>
+          <a:prstGeom prst="rect">
+            <a:avLst/>
+          </a:prstGeom>
+          <a:noFill/>
+        </p:spPr>
+        <p:txBody>
+          <a:bodyPr wrap="square">
+            <a:spAutoFit/>
+          </a:bodyPr>
+          <a:lstStyle/>
+          <a:p>
+            <a:pPr algn="ctr"/>
+            <a:r>
+              <a:rPr sz="2000" b="0" i="0">
+                <a:solidFill>
+                  <a:srgbClr val="828282"/>
+                </a:solidFill>
+                <a:latin typeface="Arial"/>
+              </a:rPr>
+              <a:t>栄光と力は私たちの神である主のもの</a:t>
+            </a:r>
+          </a:p>
+        </p:txBody>
+      </p:sp>
+      <p:sp>
+        <p:nvSpPr>
+          <p:cNvPr id="5" name="TextBox 4"/>
+          <p:cNvSpPr txBox="1"/>
+          <p:nvPr/>
+        </p:nvSpPr>
+        <p:spPr>
+          <a:xfrm>
+            <a:off x="640080" y="4494276"/>
+            <a:ext cx="10911535" cy="310896"/>
+          </a:xfrm>
+          <a:prstGeom prst="rect">
+            <a:avLst/>
+          </a:prstGeom>
+          <a:noFill/>
+        </p:spPr>
+        <p:txBody>
+          <a:bodyPr wrap="square">
+            <a:spAutoFit/>
+          </a:bodyPr>
+          <a:lstStyle/>
+          <a:p>
+            <a:pPr algn="ctr"/>
+            <a:r>
+              <a:rPr sz="2000" b="0" i="0">
+                <a:solidFill>
+                  <a:srgbClr val="828282"/>
+                </a:solidFill>
+                <a:latin typeface="Arial"/>
+              </a:rPr>
+              <a:t>夜明けの日まで</a:t>
+            </a:r>
+          </a:p>
+        </p:txBody>
+      </p:sp>
     </p:spTree>
   </p:cSld>
   <p:clrMapOvr>
@@ -3576,6 +3681,76 @@
           </a:p>
         </p:txBody>
       </p:sp>
+      <p:sp>
+        <p:nvSpPr>
+          <p:cNvPr id="4" name="TextBox 3"/>
+          <p:cNvSpPr txBox="1"/>
+          <p:nvPr/>
+        </p:nvSpPr>
+        <p:spPr>
+          <a:xfrm>
+            <a:off x="640080" y="4128516"/>
+            <a:ext cx="10911535" cy="310896"/>
+          </a:xfrm>
+          <a:prstGeom prst="rect">
+            <a:avLst/>
+          </a:prstGeom>
+          <a:noFill/>
+        </p:spPr>
+        <p:txBody>
+          <a:bodyPr wrap="square">
+            <a:spAutoFit/>
+          </a:bodyPr>
+          <a:lstStyle/>
+          <a:p>
+            <a:pPr algn="ctr"/>
+            <a:r>
+              <a:rPr sz="2000" b="0" i="0">
+                <a:solidFill>
+                  <a:srgbClr val="828282"/>
+                </a:solidFill>
+                <a:latin typeface="Arial"/>
+              </a:rPr>
+              <a:t>そしてキリストが帰るまで</a:t>
+            </a:r>
+          </a:p>
+        </p:txBody>
+      </p:sp>
+      <p:sp>
+        <p:nvSpPr>
+          <p:cNvPr id="5" name="TextBox 4"/>
+          <p:cNvSpPr txBox="1"/>
+          <p:nvPr/>
+        </p:nvSpPr>
+        <p:spPr>
+          <a:xfrm>
+            <a:off x="640080" y="4494276"/>
+            <a:ext cx="10911535" cy="310896"/>
+          </a:xfrm>
+          <a:prstGeom prst="rect">
+            <a:avLst/>
+          </a:prstGeom>
+          <a:noFill/>
+        </p:spPr>
+        <p:txBody>
+          <a:bodyPr wrap="square">
+            <a:spAutoFit/>
+          </a:bodyPr>
+          <a:lstStyle/>
+          <a:p>
+            <a:pPr algn="ctr"/>
+            <a:r>
+              <a:rPr sz="2000" b="0" i="0">
+                <a:solidFill>
+                  <a:srgbClr val="828282"/>
+                </a:solidFill>
+                <a:latin typeface="Arial"/>
+              </a:rPr>
+              <a:t>私たちは神の賛美を歌う</a:t>
+            </a:r>
+          </a:p>
+        </p:txBody>
+      </p:sp>
     </p:spTree>
   </p:cSld>
   <p:clrMapOvr>
@@ -4144,6 +4319,41 @@
           </a:p>
         </p:txBody>
       </p:sp>
+      <p:sp>
+        <p:nvSpPr>
+          <p:cNvPr id="4" name="TextBox 3"/>
+          <p:cNvSpPr txBox="1"/>
+          <p:nvPr/>
+        </p:nvSpPr>
+        <p:spPr>
+          <a:xfrm>
+            <a:off x="640080" y="4046220"/>
+            <a:ext cx="10911535" cy="310896"/>
+          </a:xfrm>
+          <a:prstGeom prst="rect">
+            <a:avLst/>
+          </a:prstGeom>
+          <a:noFill/>
+        </p:spPr>
+        <p:txBody>
+          <a:bodyPr wrap="square">
+            <a:spAutoFit/>
+          </a:bodyPr>
+          <a:lstStyle/>
+          <a:p>
+            <a:pPr algn="ctr"/>
+            <a:r>
+              <a:rPr sz="2000" b="0" i="1">
+                <a:solidFill>
+                  <a:srgbClr val="828282"/>
+                </a:solidFill>
+                <a:latin typeface="Arial"/>
+              </a:rPr>
+              <a:t>Ao que reina eternamente</a:t>
+            </a:r>
+          </a:p>
+        </p:txBody>
+      </p:sp>
     </p:spTree>
   </p:cSld>
   <p:clrMapOvr>
@@ -4782,6 +4992,76 @@
           </a:p>
         </p:txBody>
       </p:sp>
+      <p:sp>
+        <p:nvSpPr>
+          <p:cNvPr id="6" name="TextBox 5"/>
+          <p:cNvSpPr txBox="1"/>
+          <p:nvPr/>
+        </p:nvSpPr>
+        <p:spPr>
+          <a:xfrm>
+            <a:off x="640080" y="4530852"/>
+            <a:ext cx="10911535" cy="310896"/>
+          </a:xfrm>
+          <a:prstGeom prst="rect">
+            <a:avLst/>
+          </a:prstGeom>
+          <a:noFill/>
+        </p:spPr>
+        <p:txBody>
+          <a:bodyPr wrap="square">
+            <a:spAutoFit/>
+          </a:bodyPr>
+          <a:lstStyle/>
+          <a:p>
+            <a:pPr algn="ctr"/>
+            <a:r>
+              <a:rPr sz="2000" b="0" i="1">
+                <a:solidFill>
+                  <a:srgbClr val="828282"/>
+                </a:solidFill>
+                <a:latin typeface="Arial"/>
+              </a:rPr>
+              <a:t>Senhor santo e sagrado</a:t>
+            </a:r>
+          </a:p>
+        </p:txBody>
+      </p:sp>
+      <p:sp>
+        <p:nvSpPr>
+          <p:cNvPr id="7" name="TextBox 6"/>
+          <p:cNvSpPr txBox="1"/>
+          <p:nvPr/>
+        </p:nvSpPr>
+        <p:spPr>
+          <a:xfrm>
+            <a:off x="640080" y="4896612"/>
+            <a:ext cx="10911535" cy="310896"/>
+          </a:xfrm>
+          <a:prstGeom prst="rect">
+            <a:avLst/>
+          </a:prstGeom>
+          <a:noFill/>
+        </p:spPr>
+        <p:txBody>
+          <a:bodyPr wrap="square">
+            <a:spAutoFit/>
+          </a:bodyPr>
+          <a:lstStyle/>
+          <a:p>
+            <a:pPr algn="ctr"/>
+            <a:r>
+              <a:rPr sz="2000" b="0" i="1">
+                <a:solidFill>
+                  <a:srgbClr val="828282"/>
+                </a:solidFill>
+                <a:latin typeface="Arial"/>
+              </a:rPr>
+              <a:t>Senhor santo e sagrado</a:t>
+            </a:r>
+          </a:p>
+        </p:txBody>
+      </p:sp>
     </p:spTree>
   </p:cSld>
   <p:clrMapOvr>
@@ -5586,6 +5866,76 @@
           </a:p>
         </p:txBody>
       </p:sp>
+      <p:sp>
+        <p:nvSpPr>
+          <p:cNvPr id="4" name="TextBox 3"/>
+          <p:cNvSpPr txBox="1"/>
+          <p:nvPr/>
+        </p:nvSpPr>
+        <p:spPr>
+          <a:xfrm>
+            <a:off x="640080" y="4128516"/>
+            <a:ext cx="10911535" cy="310896"/>
+          </a:xfrm>
+          <a:prstGeom prst="rect">
+            <a:avLst/>
+          </a:prstGeom>
+          <a:noFill/>
+        </p:spPr>
+        <p:txBody>
+          <a:bodyPr wrap="square">
+            <a:spAutoFit/>
+          </a:bodyPr>
+          <a:lstStyle/>
+          <a:p>
+            <a:pPr algn="ctr"/>
+            <a:r>
+              <a:rPr sz="2000" b="0" i="0">
+                <a:solidFill>
+                  <a:srgbClr val="828282"/>
+                </a:solidFill>
+                <a:latin typeface="Arial"/>
+              </a:rPr>
+              <a:t>痛みが去り、憐れみが通りに満ちる場所</a:t>
+            </a:r>
+          </a:p>
+        </p:txBody>
+      </p:sp>
+      <p:sp>
+        <p:nvSpPr>
+          <p:cNvPr id="5" name="TextBox 4"/>
+          <p:cNvSpPr txBox="1"/>
+          <p:nvPr/>
+        </p:nvSpPr>
+        <p:spPr>
+          <a:xfrm>
+            <a:off x="640080" y="4494276"/>
+            <a:ext cx="10911535" cy="310896"/>
+          </a:xfrm>
+          <a:prstGeom prst="rect">
+            <a:avLst/>
+          </a:prstGeom>
+          <a:noFill/>
+        </p:spPr>
+        <p:txBody>
+          <a:bodyPr wrap="square">
+            <a:spAutoFit/>
+          </a:bodyPr>
+          <a:lstStyle/>
+          <a:p>
+            <a:pPr algn="ctr"/>
+            <a:r>
+              <a:rPr sz="2000" b="0" i="0">
+                <a:solidFill>
+                  <a:srgbClr val="828282"/>
+                </a:solidFill>
+                <a:latin typeface="Arial"/>
+              </a:rPr>
+              <a:t>私を救うために血を流された方を仰ぎ見るために</a:t>
+            </a:r>
+          </a:p>
+        </p:txBody>
+      </p:sp>
     </p:spTree>
   </p:cSld>
   <p:clrMapOvr>
@@ -5682,6 +6032,76 @@
           </a:p>
         </p:txBody>
       </p:sp>
+      <p:sp>
+        <p:nvSpPr>
+          <p:cNvPr id="4" name="TextBox 3"/>
+          <p:cNvSpPr txBox="1"/>
+          <p:nvPr/>
+        </p:nvSpPr>
+        <p:spPr>
+          <a:xfrm>
+            <a:off x="640080" y="4128516"/>
+            <a:ext cx="10911535" cy="310896"/>
+          </a:xfrm>
+          <a:prstGeom prst="rect">
+            <a:avLst/>
+          </a:prstGeom>
+          <a:noFill/>
+        </p:spPr>
+        <p:txBody>
+          <a:bodyPr wrap="square">
+            <a:spAutoFit/>
+          </a:bodyPr>
+          <a:lstStyle/>
+          <a:p>
+            <a:pPr algn="ctr"/>
+            <a:r>
+              <a:rPr sz="2000" b="0" i="0">
+                <a:solidFill>
+                  <a:srgbClr val="828282"/>
+                </a:solidFill>
+                <a:latin typeface="Arial"/>
+              </a:rPr>
+              <a:t>永遠にわたって彼とともに歩むために</a:t>
+            </a:r>
+          </a:p>
+        </p:txBody>
+      </p:sp>
+      <p:sp>
+        <p:nvSpPr>
+          <p:cNvPr id="5" name="TextBox 4"/>
+          <p:cNvSpPr txBox="1"/>
+          <p:nvPr/>
+        </p:nvSpPr>
+        <p:spPr>
+          <a:xfrm>
+            <a:off x="640080" y="4494276"/>
+            <a:ext cx="10911535" cy="310896"/>
+          </a:xfrm>
+          <a:prstGeom prst="rect">
+            <a:avLst/>
+          </a:prstGeom>
+          <a:noFill/>
+        </p:spPr>
+        <p:txBody>
+          <a:bodyPr wrap="square">
+            <a:spAutoFit/>
+          </a:bodyPr>
+          <a:lstStyle/>
+          <a:p>
+            <a:pPr algn="ctr"/>
+            <a:r>
+              <a:rPr sz="2000" b="0" i="0">
+                <a:solidFill>
+                  <a:srgbClr val="828282"/>
+                </a:solidFill>
+                <a:latin typeface="Arial"/>
+              </a:rPr>
+              <a:t>ああ、すべての者が彼の前にひざまずく日が来るだろう</a:t>
+            </a:r>
+          </a:p>
+        </p:txBody>
+      </p:sp>
     </p:spTree>
   </p:cSld>
   <p:clrMapOvr>
@@ -5778,6 +6198,76 @@
           </a:p>
         </p:txBody>
       </p:sp>
+      <p:sp>
+        <p:nvSpPr>
+          <p:cNvPr id="4" name="TextBox 3"/>
+          <p:cNvSpPr txBox="1"/>
+          <p:nvPr/>
+        </p:nvSpPr>
+        <p:spPr>
+          <a:xfrm>
+            <a:off x="640080" y="4128516"/>
+            <a:ext cx="10911535" cy="310896"/>
+          </a:xfrm>
+          <a:prstGeom prst="rect">
+            <a:avLst/>
+          </a:prstGeom>
+          <a:noFill/>
+        </p:spPr>
+        <p:txBody>
+          <a:bodyPr wrap="square">
+            <a:spAutoFit/>
+          </a:bodyPr>
+          <a:lstStyle/>
+          <a:p>
+            <a:pPr algn="ctr"/>
+            <a:r>
+              <a:rPr sz="2000" b="0" i="0">
+                <a:solidFill>
+                  <a:srgbClr val="828282"/>
+                </a:solidFill>
+                <a:latin typeface="Arial"/>
+              </a:rPr>
+              <a:t>死がもはや存在しない日が来るだろう</a:t>
+            </a:r>
+          </a:p>
+        </p:txBody>
+      </p:sp>
+      <p:sp>
+        <p:nvSpPr>
+          <p:cNvPr id="5" name="TextBox 4"/>
+          <p:cNvSpPr txBox="1"/>
+          <p:nvPr/>
+        </p:nvSpPr>
+        <p:spPr>
+          <a:xfrm>
+            <a:off x="640080" y="4494276"/>
+            <a:ext cx="10911535" cy="310896"/>
+          </a:xfrm>
+          <a:prstGeom prst="rect">
+            <a:avLst/>
+          </a:prstGeom>
+          <a:noFill/>
+        </p:spPr>
+        <p:txBody>
+          <a:bodyPr wrap="square">
+            <a:spAutoFit/>
+          </a:bodyPr>
+          <a:lstStyle/>
+          <a:p>
+            <a:pPr algn="ctr"/>
+            <a:r>
+              <a:rPr sz="2000" b="0" i="0">
+                <a:solidFill>
+                  <a:srgbClr val="828282"/>
+                </a:solidFill>
+                <a:latin typeface="Arial"/>
+              </a:rPr>
+              <a:t>すべてのひざが曲がる日が来るだろう</a:t>
+            </a:r>
+          </a:p>
+        </p:txBody>
+      </p:sp>
     </p:spTree>
   </p:cSld>
   <p:clrMapOvr>
@@ -5874,6 +6364,76 @@
           </a:p>
         </p:txBody>
       </p:sp>
+      <p:sp>
+        <p:nvSpPr>
+          <p:cNvPr id="4" name="TextBox 3"/>
+          <p:cNvSpPr txBox="1"/>
+          <p:nvPr/>
+        </p:nvSpPr>
+        <p:spPr>
+          <a:xfrm>
+            <a:off x="640080" y="4128516"/>
+            <a:ext cx="10911535" cy="310896"/>
+          </a:xfrm>
+          <a:prstGeom prst="rect">
+            <a:avLst/>
+          </a:prstGeom>
+          <a:noFill/>
+        </p:spPr>
+        <p:txBody>
+          <a:bodyPr wrap="square">
+            <a:spAutoFit/>
+          </a:bodyPr>
+          <a:lstStyle/>
+          <a:p>
+            <a:pPr algn="ctr"/>
+            <a:r>
+              <a:rPr sz="2000" b="0" i="0">
+                <a:solidFill>
+                  <a:srgbClr val="828282"/>
+                </a:solidFill>
+                <a:latin typeface="Arial"/>
+              </a:rPr>
+              <a:t>そしてすべての創造物が歌うだろう</a:t>
+            </a:r>
+          </a:p>
+        </p:txBody>
+      </p:sp>
+      <p:sp>
+        <p:nvSpPr>
+          <p:cNvPr id="5" name="TextBox 4"/>
+          <p:cNvSpPr txBox="1"/>
+          <p:nvPr/>
+        </p:nvSpPr>
+        <p:spPr>
+          <a:xfrm>
+            <a:off x="640080" y="4494276"/>
+            <a:ext cx="10911535" cy="310896"/>
+          </a:xfrm>
+          <a:prstGeom prst="rect">
+            <a:avLst/>
+          </a:prstGeom>
+          <a:noFill/>
+        </p:spPr>
+        <p:txBody>
+          <a:bodyPr wrap="square">
+            <a:spAutoFit/>
+          </a:bodyPr>
+          <a:lstStyle/>
+          <a:p>
+            <a:pPr algn="ctr"/>
+            <a:r>
+              <a:rPr sz="2000" b="0" i="0">
+                <a:solidFill>
+                  <a:srgbClr val="828282"/>
+                </a:solidFill>
+                <a:latin typeface="Arial"/>
+              </a:rPr>
+              <a:t>聖い、聖い、聖いは主である</a:t>
+            </a:r>
+          </a:p>
+        </p:txBody>
+      </p:sp>
     </p:spTree>
   </p:cSld>
   <p:clrMapOvr>
@@ -5966,6 +6526,76 @@
                 <a:latin typeface="Arial"/>
               </a:rPr>
               <a:t>Santo, santo, santo é o Senhor</a:t>
+            </a:r>
+          </a:p>
+        </p:txBody>
+      </p:sp>
+      <p:sp>
+        <p:nvSpPr>
+          <p:cNvPr id="4" name="TextBox 3"/>
+          <p:cNvSpPr txBox="1"/>
+          <p:nvPr/>
+        </p:nvSpPr>
+        <p:spPr>
+          <a:xfrm>
+            <a:off x="640080" y="4128516"/>
+            <a:ext cx="10911535" cy="310896"/>
+          </a:xfrm>
+          <a:prstGeom prst="rect">
+            <a:avLst/>
+          </a:prstGeom>
+          <a:noFill/>
+        </p:spPr>
+        <p:txBody>
+          <a:bodyPr wrap="square">
+            <a:spAutoFit/>
+          </a:bodyPr>
+          <a:lstStyle/>
+          <a:p>
+            <a:pPr algn="ctr"/>
+            <a:r>
+              <a:rPr sz="2000" b="0" i="0">
+                <a:solidFill>
+                  <a:srgbClr val="828282"/>
+                </a:solidFill>
+                <a:latin typeface="Arial"/>
+              </a:rPr>
+              <a:t>聖い、聖い、聖いは主である</a:t>
+            </a:r>
+          </a:p>
+        </p:txBody>
+      </p:sp>
+      <p:sp>
+        <p:nvSpPr>
+          <p:cNvPr id="5" name="TextBox 4"/>
+          <p:cNvSpPr txBox="1"/>
+          <p:nvPr/>
+        </p:nvSpPr>
+        <p:spPr>
+          <a:xfrm>
+            <a:off x="640080" y="4494276"/>
+            <a:ext cx="10911535" cy="310896"/>
+          </a:xfrm>
+          <a:prstGeom prst="rect">
+            <a:avLst/>
+          </a:prstGeom>
+          <a:noFill/>
+        </p:spPr>
+        <p:txBody>
+          <a:bodyPr wrap="square">
+            <a:spAutoFit/>
+          </a:bodyPr>
+          <a:lstStyle/>
+          <a:p>
+            <a:pPr algn="ctr"/>
+            <a:r>
+              <a:rPr sz="2000" b="0" i="0">
+                <a:solidFill>
+                  <a:srgbClr val="828282"/>
+                </a:solidFill>
+                <a:latin typeface="Arial"/>
+              </a:rPr>
+              <a:t>聖い、聖い、聖いは主である</a:t>
             </a:r>
           </a:p>
         </p:txBody>
